--- a/documents/manuals/OnlineAppointSystem_ユーザーマニュアル.pptx
+++ b/documents/manuals/OnlineAppointSystem_ユーザーマニュアル.pptx
@@ -27,6 +27,7 @@
     <p:sldId id="275" r:id="rId26"/>
     <p:sldId id="276" r:id="rId27"/>
     <p:sldId id="277" r:id="rId28"/>
+    <p:sldId id="278" r:id="rId29"/>
   </p:sldIdLst>
   <p:sldSz cx="12188952" cy="6858000" type="screen4x3"/>
   <p:notesSz cx="6858000" cy="9144000"/>
@@ -3124,7 +3125,7 @@
             <a:avLst/>
           </a:prstGeom>
           <a:solidFill>
-            <a:srgbClr val="735763"/>
+            <a:srgbClr val="1A2B4A"/>
           </a:solidFill>
           <a:ln>
             <a:noFill/>
@@ -3167,7 +3168,7 @@
             <a:avLst/>
           </a:prstGeom>
           <a:solidFill>
-            <a:srgbClr val="FCF0DE"/>
+            <a:srgbClr val="F8F5EE"/>
           </a:solidFill>
           <a:ln>
             <a:noFill/>
@@ -3210,7 +3211,7 @@
             <a:avLst/>
           </a:prstGeom>
           <a:solidFill>
-            <a:srgbClr val="F79321"/>
+            <a:srgbClr val="D4AF37"/>
           </a:solidFill>
           <a:ln>
             <a:noFill/>
@@ -3299,7 +3300,7 @@
             <a:r>
               <a:rPr sz="2800" b="0">
                 <a:solidFill>
-                  <a:srgbClr val="F79321"/>
+                  <a:srgbClr val="D4AF37"/>
                 </a:solidFill>
                 <a:latin typeface="Noto Sans JP"/>
               </a:rPr>
@@ -3323,7 +3324,7 @@
             <a:avLst/>
           </a:prstGeom>
           <a:solidFill>
-            <a:srgbClr val="F79321"/>
+            <a:srgbClr val="D4AF37"/>
           </a:solidFill>
           <a:ln>
             <a:noFill/>
@@ -3375,13 +3376,13 @@
           <a:p>
             <a:pPr algn="l"/>
             <a:r>
-              <a:rPr sz="1800" b="0">
-                <a:solidFill>
-                  <a:srgbClr val="8B7355"/>
-                </a:solidFill>
-                <a:latin typeface="Noto Sans JP"/>
-              </a:rPr>
-              <a:t>2026年3月</a:t>
+              <a:rPr sz="1600" b="0">
+                <a:solidFill>
+                  <a:srgbClr val="6B7C9E"/>
+                </a:solidFill>
+                <a:latin typeface="Noto Sans JP"/>
+              </a:rPr>
+              <a:t>2026年3月  |  React SPA v3</a:t>
             </a:r>
           </a:p>
         </p:txBody>
@@ -3412,7 +3413,7 @@
             <a:r>
               <a:rPr sz="7200" b="1">
                 <a:solidFill>
-                  <a:srgbClr val="735763"/>
+                  <a:srgbClr val="1A2B4A"/>
                 </a:solidFill>
                 <a:latin typeface="Noto Sans JP"/>
               </a:rPr>
@@ -3497,7 +3498,7 @@
             <a:avLst/>
           </a:prstGeom>
           <a:solidFill>
-            <a:srgbClr val="735763"/>
+            <a:srgbClr val="1A2B4A"/>
           </a:solidFill>
           <a:ln>
             <a:noFill/>
@@ -3555,7 +3556,7 @@
                 </a:solidFill>
                 <a:latin typeface="Noto Sans JP"/>
               </a:rPr>
-              <a:t>モバイル対応</a:t>
+              <a:t>プライバシーポリシー</a:t>
             </a:r>
           </a:p>
         </p:txBody>
@@ -3568,14 +3569,14 @@
         </p:nvSpPr>
         <p:spPr>
           <a:xfrm>
-            <a:off x="9994392" y="91440"/>
-            <a:ext cx="2011680" cy="411480"/>
+            <a:off x="9811512" y="91440"/>
+            <a:ext cx="2194560" cy="411480"/>
           </a:xfrm>
           <a:prstGeom prst="rect">
             <a:avLst/>
           </a:prstGeom>
           <a:solidFill>
-            <a:srgbClr val="F79321"/>
+            <a:srgbClr val="D4AF37"/>
           </a:solidFill>
           <a:ln>
             <a:noFill/>
@@ -3611,8 +3612,8 @@
         </p:nvSpPr>
         <p:spPr>
           <a:xfrm>
-            <a:off x="9994392" y="91440"/>
-            <a:ext cx="2011680" cy="411480"/>
+            <a:off x="9811512" y="91440"/>
+            <a:ext cx="2194560" cy="411480"/>
           </a:xfrm>
           <a:prstGeom prst="rect">
             <a:avLst/>
@@ -3629,7 +3630,7 @@
             <a:r>
               <a:rPr sz="1300" b="1">
                 <a:solidFill>
-                  <a:srgbClr val="FFFFFF"/>
+                  <a:srgbClr val="1A2B4A"/>
                 </a:solidFill>
                 <a:latin typeface="Noto Sans JP"/>
               </a:rPr>
@@ -3653,7 +3654,7 @@
             <a:avLst/>
           </a:prstGeom>
           <a:solidFill>
-            <a:srgbClr val="FCF0DE"/>
+            <a:srgbClr val="F8F5EE"/>
           </a:solidFill>
           <a:ln>
             <a:noFill/>
@@ -3705,13 +3706,13 @@
           <a:p>
             <a:pPr algn="l"/>
             <a:r>
-              <a:rPr sz="1300" b="0">
-                <a:solidFill>
-                  <a:srgbClr val="8B7355"/>
-                </a:solidFill>
-                <a:latin typeface="Noto Sans JP"/>
-              </a:rPr>
-              <a:t>スマートフォンからも利用可能</a:t>
+              <a:rPr sz="1200" b="0">
+                <a:solidFill>
+                  <a:srgbClr val="6B7C9E"/>
+                </a:solidFill>
+                <a:latin typeface="Noto Sans JP"/>
+              </a:rPr>
+              <a:t>https://oas.kojinius.jp/privacy-policy</a:t>
             </a:r>
           </a:p>
         </p:txBody>
@@ -3739,56 +3740,53 @@
           <a:lstStyle/>
           <a:p>
             <a:r>
-              <a:rPr sz="1500" b="1">
-                <a:solidFill>
-                  <a:srgbClr val="735763"/>
-                </a:solidFill>
-                <a:latin typeface="Noto Sans JP"/>
-              </a:rPr>
-              <a:t>スマートフォンでも利用可能</a:t>
-            </a:r>
-          </a:p>
-          <a:p>
-            <a:pPr lvl="1"/>
+              <a:rPr sz="1400" b="1">
+                <a:solidFill>
+                  <a:srgbClr val="1A2B4A"/>
+                </a:solidFill>
+                <a:latin typeface="Noto Sans JP"/>
+              </a:rPr>
+              <a:t>個人情報の取り扱い</a:t>
+            </a:r>
+          </a:p>
+          <a:p>
             <a:r>
               <a:rPr sz="1300">
                 <a:solidFill>
-                  <a:srgbClr val="3D2B1F"/>
-                </a:solidFill>
-                <a:latin typeface="Noto Sans JP"/>
-              </a:rPr>
-              <a:t>・iOS・Android 対応</a:t>
-            </a:r>
-          </a:p>
-          <a:p>
-            <a:pPr lvl="1"/>
+                  <a:srgbClr val="1A2B4A"/>
+                </a:solidFill>
+                <a:latin typeface="Noto Sans JP"/>
+              </a:rPr>
+              <a:t>・入力情報は予約管理のみに使用</a:t>
+            </a:r>
+          </a:p>
+          <a:p>
             <a:r>
               <a:rPr sz="1300">
                 <a:solidFill>
-                  <a:srgbClr val="3D2B1F"/>
-                </a:solidFill>
-                <a:latin typeface="Noto Sans JP"/>
-              </a:rPr>
-              <a:t>・ブラウザでアクセスするだけ</a:t>
-            </a:r>
-          </a:p>
-          <a:p>
-            <a:pPr lvl="1"/>
+                  <a:srgbClr val="1A2B4A"/>
+                </a:solidFill>
+                <a:latin typeface="Noto Sans JP"/>
+              </a:rPr>
+              <a:t>・第三者への提供は行いません</a:t>
+            </a:r>
+          </a:p>
+          <a:p>
             <a:r>
               <a:rPr sz="1300">
                 <a:solidFill>
-                  <a:srgbClr val="3D2B1F"/>
-                </a:solidFill>
-                <a:latin typeface="Noto Sans JP"/>
-              </a:rPr>
-              <a:t>・アプリインストール不要</a:t>
+                  <a:srgbClr val="1A2B4A"/>
+                </a:solidFill>
+                <a:latin typeface="Noto Sans JP"/>
+              </a:rPr>
+              <a:t>・お問い合わせは院内窓口まで</a:t>
             </a:r>
           </a:p>
         </p:txBody>
       </p:sp>
       <p:pic>
         <p:nvPicPr>
-          <p:cNvPr id="10" name="Picture 9" descr="m01_calendar_mobile.png"/>
+          <p:cNvPr id="10" name="Picture 9" descr="07_privacy_policy.png"/>
           <p:cNvPicPr>
             <a:picLocks noChangeAspect="1"/>
           </p:cNvPicPr>
@@ -3802,8 +3800,8 @@
         </p:blipFill>
         <p:spPr>
           <a:xfrm>
-            <a:off x="6773451" y="868680"/>
-            <a:ext cx="2619690" cy="5669280"/>
+            <a:off x="4160520" y="1251585"/>
+            <a:ext cx="7845552" cy="4903470"/>
           </a:xfrm>
           <a:prstGeom prst="rect">
             <a:avLst/>
@@ -3843,7 +3841,7 @@
             <a:avLst/>
           </a:prstGeom>
           <a:solidFill>
-            <a:srgbClr val="735763"/>
+            <a:srgbClr val="FFFFFF"/>
           </a:solidFill>
           <a:ln>
             <a:noFill/>
@@ -3880,13 +3878,13 @@
         <p:spPr>
           <a:xfrm>
             <a:off x="0" y="0"/>
-            <a:ext cx="164592" cy="6858000"/>
+            <a:ext cx="12188952" cy="594360"/>
           </a:xfrm>
           <a:prstGeom prst="rect">
             <a:avLst/>
           </a:prstGeom>
           <a:solidFill>
-            <a:srgbClr val="F79321"/>
+            <a:srgbClr val="1A2B4A"/>
           </a:solidFill>
           <a:ln>
             <a:noFill/>
@@ -3922,8 +3920,8 @@
         </p:nvSpPr>
         <p:spPr>
           <a:xfrm>
-            <a:off x="457200" y="2286000"/>
-            <a:ext cx="7315200" cy="1097280"/>
+            <a:off x="274320" y="73152"/>
+            <a:ext cx="8686800" cy="594360"/>
           </a:xfrm>
           <a:prstGeom prst="rect">
             <a:avLst/>
@@ -3938,13 +3936,13 @@
           <a:p>
             <a:pPr algn="l"/>
             <a:r>
-              <a:rPr sz="4200" b="1">
-                <a:solidFill>
-                  <a:srgbClr val="FCF0DE"/>
-                </a:solidFill>
-                <a:latin typeface="Noto Sans JP"/>
-              </a:rPr>
-              <a:t>管理者向け機能</a:t>
+              <a:rPr sz="2200" b="1">
+                <a:solidFill>
+                  <a:srgbClr val="FFFFFF"/>
+                </a:solidFill>
+                <a:latin typeface="Noto Sans JP"/>
+              </a:rPr>
+              <a:t>モバイル対応</a:t>
             </a:r>
           </a:p>
         </p:txBody>
@@ -3957,14 +3955,14 @@
         </p:nvSpPr>
         <p:spPr>
           <a:xfrm>
-            <a:off x="457200" y="3291840"/>
-            <a:ext cx="3200400" cy="54864"/>
+            <a:off x="9811512" y="91440"/>
+            <a:ext cx="2194560" cy="411480"/>
           </a:xfrm>
           <a:prstGeom prst="rect">
             <a:avLst/>
           </a:prstGeom>
           <a:solidFill>
-            <a:srgbClr val="F79321"/>
+            <a:srgbClr val="D4AF37"/>
           </a:solidFill>
           <a:ln>
             <a:noFill/>
@@ -4000,8 +3998,8 @@
         </p:nvSpPr>
         <p:spPr>
           <a:xfrm>
-            <a:off x="731520" y="3657600"/>
-            <a:ext cx="9144000" cy="411480"/>
+            <a:off x="9811512" y="91440"/>
+            <a:ext cx="2194560" cy="411480"/>
           </a:xfrm>
           <a:prstGeom prst="rect">
             <a:avLst/>
@@ -4014,29 +4012,72 @@
           </a:bodyPr>
           <a:lstStyle/>
           <a:p>
-            <a:pPr algn="l"/>
-            <a:r>
-              <a:rPr sz="1600" b="0">
-                <a:solidFill>
-                  <a:srgbClr val="FFD5A0"/>
-                </a:solidFill>
-                <a:latin typeface="Noto Sans JP"/>
-              </a:rPr>
-              <a:t>▸  管理者ログイン</a:t>
-            </a:r>
-          </a:p>
-        </p:txBody>
-      </p:sp>
-      <p:sp>
-        <p:nvSpPr>
-          <p:cNvPr id="7" name="TextBox 6"/>
+            <a:pPr algn="ctr"/>
+            <a:r>
+              <a:rPr sz="1300" b="1">
+                <a:solidFill>
+                  <a:srgbClr val="1A2B4A"/>
+                </a:solidFill>
+                <a:latin typeface="Noto Sans JP"/>
+              </a:rPr>
+              <a:t>患者向け</a:t>
+            </a:r>
+          </a:p>
+        </p:txBody>
+      </p:sp>
+      <p:sp>
+        <p:nvSpPr>
+          <p:cNvPr id="7" name="Rectangle 6"/>
+          <p:cNvSpPr/>
+          <p:nvPr/>
+        </p:nvSpPr>
+        <p:spPr>
+          <a:xfrm>
+            <a:off x="0" y="685800"/>
+            <a:ext cx="3931920" cy="6035040"/>
+          </a:xfrm>
+          <a:prstGeom prst="rect">
+            <a:avLst/>
+          </a:prstGeom>
+          <a:solidFill>
+            <a:srgbClr val="F8F5EE"/>
+          </a:solidFill>
+          <a:ln>
+            <a:noFill/>
+          </a:ln>
+        </p:spPr>
+        <p:style>
+          <a:lnRef idx="1">
+            <a:schemeClr val="accent1"/>
+          </a:lnRef>
+          <a:fillRef idx="3">
+            <a:schemeClr val="accent1"/>
+          </a:fillRef>
+          <a:effectRef idx="2">
+            <a:schemeClr val="accent1"/>
+          </a:effectRef>
+          <a:fontRef idx="minor">
+            <a:schemeClr val="lt1"/>
+          </a:fontRef>
+        </p:style>
+        <p:txBody>
+          <a:bodyPr rtlCol="0" anchor="ctr"/>
+          <a:lstStyle/>
+          <a:p>
+            <a:pPr algn="ctr"/>
+          </a:p>
+        </p:txBody>
+      </p:sp>
+      <p:sp>
+        <p:nvSpPr>
+          <p:cNvPr id="8" name="TextBox 7"/>
           <p:cNvSpPr txBox="1"/>
           <p:nvPr/>
         </p:nvSpPr>
         <p:spPr>
           <a:xfrm>
-            <a:off x="731520" y="4069080"/>
-            <a:ext cx="9144000" cy="411480"/>
+            <a:off x="228600" y="822960"/>
+            <a:ext cx="3657600" cy="457200"/>
           </a:xfrm>
           <a:prstGeom prst="rect">
             <a:avLst/>
@@ -4051,27 +4092,27 @@
           <a:p>
             <a:pPr algn="l"/>
             <a:r>
-              <a:rPr sz="1600" b="0">
-                <a:solidFill>
-                  <a:srgbClr val="FFD5A0"/>
-                </a:solidFill>
-                <a:latin typeface="Noto Sans JP"/>
-              </a:rPr>
-              <a:t>▸  予約ダッシュボード</a:t>
-            </a:r>
-          </a:p>
-        </p:txBody>
-      </p:sp>
-      <p:sp>
-        <p:nvSpPr>
-          <p:cNvPr id="8" name="TextBox 7"/>
+              <a:rPr sz="1200" b="0">
+                <a:solidFill>
+                  <a:srgbClr val="6B7C9E"/>
+                </a:solidFill>
+                <a:latin typeface="Noto Sans JP"/>
+              </a:rPr>
+              <a:t>スマートフォンからも利用可能</a:t>
+            </a:r>
+          </a:p>
+        </p:txBody>
+      </p:sp>
+      <p:sp>
+        <p:nvSpPr>
+          <p:cNvPr id="9" name="TextBox 8"/>
           <p:cNvSpPr txBox="1"/>
           <p:nvPr/>
         </p:nvSpPr>
         <p:spPr>
           <a:xfrm>
-            <a:off x="731520" y="4480560"/>
-            <a:ext cx="9144000" cy="411480"/>
+            <a:off x="228600" y="1188720"/>
+            <a:ext cx="3657600" cy="5440680"/>
           </a:xfrm>
           <a:prstGeom prst="rect">
             <a:avLst/>
@@ -4084,124 +4125,114 @@
           </a:bodyPr>
           <a:lstStyle/>
           <a:p>
-            <a:pPr algn="l"/>
-            <a:r>
-              <a:rPr sz="1600" b="0">
-                <a:solidFill>
-                  <a:srgbClr val="FFD5A0"/>
-                </a:solidFill>
-                <a:latin typeface="Noto Sans JP"/>
-              </a:rPr>
-              <a:t>▸  予約詳細モーダル</a:t>
-            </a:r>
-          </a:p>
-        </p:txBody>
-      </p:sp>
-      <p:sp>
-        <p:nvSpPr>
-          <p:cNvPr id="9" name="TextBox 8"/>
-          <p:cNvSpPr txBox="1"/>
-          <p:nvPr/>
-        </p:nvSpPr>
-        <p:spPr>
-          <a:xfrm>
-            <a:off x="731520" y="4892040"/>
-            <a:ext cx="9144000" cy="411480"/>
-          </a:xfrm>
-          <a:prstGeom prst="rect">
-            <a:avLst/>
-          </a:prstGeom>
-          <a:noFill/>
-        </p:spPr>
-        <p:txBody>
-          <a:bodyPr wrap="square">
-            <a:spAutoFit/>
-          </a:bodyPr>
-          <a:lstStyle/>
-          <a:p>
-            <a:pPr algn="l"/>
-            <a:r>
-              <a:rPr sz="1600" b="0">
-                <a:solidFill>
-                  <a:srgbClr val="FFD5A0"/>
-                </a:solidFill>
-                <a:latin typeface="Noto Sans JP"/>
-              </a:rPr>
-              <a:t>▸  設定（院内情報・営業時間・休日・お知らせ・アカウント）</a:t>
-            </a:r>
-          </a:p>
-        </p:txBody>
-      </p:sp>
-      <p:sp>
-        <p:nvSpPr>
-          <p:cNvPr id="10" name="TextBox 9"/>
-          <p:cNvSpPr txBox="1"/>
-          <p:nvPr/>
-        </p:nvSpPr>
-        <p:spPr>
-          <a:xfrm>
-            <a:off x="731520" y="5303520"/>
-            <a:ext cx="9144000" cy="411480"/>
-          </a:xfrm>
-          <a:prstGeom prst="rect">
-            <a:avLst/>
-          </a:prstGeom>
-          <a:noFill/>
-        </p:spPr>
-        <p:txBody>
-          <a:bodyPr wrap="square">
-            <a:spAutoFit/>
-          </a:bodyPr>
-          <a:lstStyle/>
-          <a:p>
-            <a:pPr algn="l"/>
-            <a:r>
-              <a:rPr sz="1600" b="0">
-                <a:solidFill>
-                  <a:srgbClr val="FFD5A0"/>
-                </a:solidFill>
-                <a:latin typeface="Noto Sans JP"/>
-              </a:rPr>
-              <a:t>▸  ユーザー管理</a:t>
-            </a:r>
-          </a:p>
-        </p:txBody>
-      </p:sp>
-      <p:sp>
-        <p:nvSpPr>
-          <p:cNvPr id="11" name="TextBox 10"/>
-          <p:cNvSpPr txBox="1"/>
-          <p:nvPr/>
-        </p:nvSpPr>
-        <p:spPr>
-          <a:xfrm>
-            <a:off x="731520" y="5715000"/>
-            <a:ext cx="9144000" cy="411480"/>
-          </a:xfrm>
-          <a:prstGeom prst="rect">
-            <a:avLst/>
-          </a:prstGeom>
-          <a:noFill/>
-        </p:spPr>
-        <p:txBody>
-          <a:bodyPr wrap="square">
-            <a:spAutoFit/>
-          </a:bodyPr>
-          <a:lstStyle/>
-          <a:p>
-            <a:pPr algn="l"/>
-            <a:r>
-              <a:rPr sz="1600" b="0">
-                <a:solidFill>
-                  <a:srgbClr val="FFD5A0"/>
-                </a:solidFill>
-                <a:latin typeface="Noto Sans JP"/>
-              </a:rPr>
-              <a:t>▸  通知メール設定</a:t>
-            </a:r>
-          </a:p>
-        </p:txBody>
-      </p:sp>
+            <a:r>
+              <a:rPr sz="1400" b="1">
+                <a:solidFill>
+                  <a:srgbClr val="1A2B4A"/>
+                </a:solidFill>
+                <a:latin typeface="Noto Sans JP"/>
+              </a:rPr>
+              <a:t>スマートフォン対応</a:t>
+            </a:r>
+          </a:p>
+          <a:p>
+            <a:r>
+              <a:rPr sz="1300">
+                <a:solidFill>
+                  <a:srgbClr val="1A2B4A"/>
+                </a:solidFill>
+                <a:latin typeface="Noto Sans JP"/>
+              </a:rPr>
+              <a:t>・iOS・Android 対応</a:t>
+            </a:r>
+          </a:p>
+          <a:p>
+            <a:r>
+              <a:rPr sz="1300">
+                <a:solidFill>
+                  <a:srgbClr val="1A2B4A"/>
+                </a:solidFill>
+                <a:latin typeface="Noto Sans JP"/>
+              </a:rPr>
+              <a:t>・ブラウザでアクセスするだけ</a:t>
+            </a:r>
+          </a:p>
+          <a:p>
+            <a:r>
+              <a:rPr sz="1300">
+                <a:solidFill>
+                  <a:srgbClr val="1A2B4A"/>
+                </a:solidFill>
+                <a:latin typeface="Noto Sans JP"/>
+              </a:rPr>
+              <a:t>・アプリインストール不要</a:t>
+            </a:r>
+          </a:p>
+          <a:p>
+            <a:r>
+              <a:rPr sz="500"/>
+              <a:t/>
+            </a:r>
+          </a:p>
+          <a:p>
+            <a:r>
+              <a:rPr sz="1400" b="1">
+                <a:solidFill>
+                  <a:srgbClr val="1A2B4A"/>
+                </a:solidFill>
+                <a:latin typeface="Noto Sans JP"/>
+              </a:rPr>
+              <a:t>操作性</a:t>
+            </a:r>
+          </a:p>
+          <a:p>
+            <a:r>
+              <a:rPr sz="1300">
+                <a:solidFill>
+                  <a:srgbClr val="1A2B4A"/>
+                </a:solidFill>
+                <a:latin typeface="Noto Sans JP"/>
+              </a:rPr>
+              <a:t>・タッチ操作に最適化</a:t>
+            </a:r>
+          </a:p>
+          <a:p>
+            <a:r>
+              <a:rPr sz="1300">
+                <a:solidFill>
+                  <a:srgbClr val="1A2B4A"/>
+                </a:solidFill>
+                <a:latin typeface="Noto Sans JP"/>
+              </a:rPr>
+              <a:t>・ボタン・カレンダー全対応</a:t>
+            </a:r>
+          </a:p>
+        </p:txBody>
+      </p:sp>
+      <p:pic>
+        <p:nvPicPr>
+          <p:cNvPr id="10" name="Picture 9" descr="m01_calendar_mobile.png"/>
+          <p:cNvPicPr>
+            <a:picLocks noChangeAspect="1"/>
+          </p:cNvPicPr>
+          <p:nvPr/>
+        </p:nvPicPr>
+        <p:blipFill>
+          <a:blip r:embed="rId2"/>
+          <a:stretch>
+            <a:fillRect/>
+          </a:stretch>
+        </p:blipFill>
+        <p:spPr>
+          <a:xfrm>
+            <a:off x="6773451" y="868680"/>
+            <a:ext cx="2619690" cy="5669280"/>
+          </a:xfrm>
+          <a:prstGeom prst="rect">
+            <a:avLst/>
+          </a:prstGeom>
+        </p:spPr>
+      </p:pic>
     </p:spTree>
   </p:cSld>
   <p:clrMapOvr>
@@ -4235,7 +4266,7 @@
             <a:avLst/>
           </a:prstGeom>
           <a:solidFill>
-            <a:srgbClr val="FFFFFF"/>
+            <a:srgbClr val="1A2B4A"/>
           </a:solidFill>
           <a:ln>
             <a:noFill/>
@@ -4272,13 +4303,13 @@
         <p:spPr>
           <a:xfrm>
             <a:off x="0" y="0"/>
-            <a:ext cx="12188952" cy="594360"/>
+            <a:ext cx="164592" cy="6858000"/>
           </a:xfrm>
           <a:prstGeom prst="rect">
             <a:avLst/>
           </a:prstGeom>
           <a:solidFill>
-            <a:srgbClr val="735763"/>
+            <a:srgbClr val="D4AF37"/>
           </a:solidFill>
           <a:ln>
             <a:noFill/>
@@ -4314,8 +4345,8 @@
         </p:nvSpPr>
         <p:spPr>
           <a:xfrm>
-            <a:off x="274320" y="73152"/>
-            <a:ext cx="8686800" cy="594360"/>
+            <a:off x="457200" y="2286000"/>
+            <a:ext cx="7315200" cy="1097280"/>
           </a:xfrm>
           <a:prstGeom prst="rect">
             <a:avLst/>
@@ -4330,13 +4361,13 @@
           <a:p>
             <a:pPr algn="l"/>
             <a:r>
-              <a:rPr sz="2200" b="1">
+              <a:rPr sz="4200" b="1">
                 <a:solidFill>
                   <a:srgbClr val="FFFFFF"/>
                 </a:solidFill>
                 <a:latin typeface="Noto Sans JP"/>
               </a:rPr>
-              <a:t>管理者ログイン</a:t>
+              <a:t>管理者向け機能</a:t>
             </a:r>
           </a:p>
         </p:txBody>
@@ -4349,14 +4380,14 @@
         </p:nvSpPr>
         <p:spPr>
           <a:xfrm>
-            <a:off x="9994392" y="91440"/>
-            <a:ext cx="2011680" cy="411480"/>
+            <a:off x="457200" y="3291840"/>
+            <a:ext cx="3200400" cy="54864"/>
           </a:xfrm>
           <a:prstGeom prst="rect">
             <a:avLst/>
           </a:prstGeom>
           <a:solidFill>
-            <a:srgbClr val="735763"/>
+            <a:srgbClr val="D4AF37"/>
           </a:solidFill>
           <a:ln>
             <a:noFill/>
@@ -4392,8 +4423,8 @@
         </p:nvSpPr>
         <p:spPr>
           <a:xfrm>
-            <a:off x="9994392" y="91440"/>
-            <a:ext cx="2011680" cy="411480"/>
+            <a:off x="731520" y="3657600"/>
+            <a:ext cx="9144000" cy="411480"/>
           </a:xfrm>
           <a:prstGeom prst="rect">
             <a:avLst/>
@@ -4406,72 +4437,29 @@
           </a:bodyPr>
           <a:lstStyle/>
           <a:p>
-            <a:pPr algn="ctr"/>
-            <a:r>
-              <a:rPr sz="1300" b="1">
-                <a:solidFill>
-                  <a:srgbClr val="FFFFFF"/>
-                </a:solidFill>
-                <a:latin typeface="Noto Sans JP"/>
-              </a:rPr>
-              <a:t>管理者向け</a:t>
-            </a:r>
-          </a:p>
-        </p:txBody>
-      </p:sp>
-      <p:sp>
-        <p:nvSpPr>
-          <p:cNvPr id="7" name="Rectangle 6"/>
-          <p:cNvSpPr/>
-          <p:nvPr/>
-        </p:nvSpPr>
-        <p:spPr>
-          <a:xfrm>
-            <a:off x="0" y="685800"/>
-            <a:ext cx="3931920" cy="6035040"/>
-          </a:xfrm>
-          <a:prstGeom prst="rect">
-            <a:avLst/>
-          </a:prstGeom>
-          <a:solidFill>
-            <a:srgbClr val="FCF0DE"/>
-          </a:solidFill>
-          <a:ln>
-            <a:noFill/>
-          </a:ln>
-        </p:spPr>
-        <p:style>
-          <a:lnRef idx="1">
-            <a:schemeClr val="accent1"/>
-          </a:lnRef>
-          <a:fillRef idx="3">
-            <a:schemeClr val="accent1"/>
-          </a:fillRef>
-          <a:effectRef idx="2">
-            <a:schemeClr val="accent1"/>
-          </a:effectRef>
-          <a:fontRef idx="minor">
-            <a:schemeClr val="lt1"/>
-          </a:fontRef>
-        </p:style>
-        <p:txBody>
-          <a:bodyPr rtlCol="0" anchor="ctr"/>
-          <a:lstStyle/>
-          <a:p>
-            <a:pPr algn="ctr"/>
-          </a:p>
-        </p:txBody>
-      </p:sp>
-      <p:sp>
-        <p:nvSpPr>
-          <p:cNvPr id="8" name="TextBox 7"/>
+            <a:pPr algn="l"/>
+            <a:r>
+              <a:rPr sz="1600" b="0">
+                <a:solidFill>
+                  <a:srgbClr val="FFE080"/>
+                </a:solidFill>
+                <a:latin typeface="Noto Sans JP"/>
+              </a:rPr>
+              <a:t>▸  管理者ログイン（/login）</a:t>
+            </a:r>
+          </a:p>
+        </p:txBody>
+      </p:sp>
+      <p:sp>
+        <p:nvSpPr>
+          <p:cNvPr id="7" name="TextBox 6"/>
           <p:cNvSpPr txBox="1"/>
           <p:nvPr/>
         </p:nvSpPr>
         <p:spPr>
           <a:xfrm>
-            <a:off x="228600" y="822960"/>
-            <a:ext cx="3657600" cy="457200"/>
+            <a:off x="731520" y="4069080"/>
+            <a:ext cx="9144000" cy="411480"/>
           </a:xfrm>
           <a:prstGeom prst="rect">
             <a:avLst/>
@@ -4486,27 +4474,27 @@
           <a:p>
             <a:pPr algn="l"/>
             <a:r>
-              <a:rPr sz="1300" b="0">
-                <a:solidFill>
-                  <a:srgbClr val="8B7355"/>
-                </a:solidFill>
-                <a:latin typeface="Noto Sans JP"/>
-              </a:rPr>
-              <a:t>管理画面へのアクセス</a:t>
-            </a:r>
-          </a:p>
-        </p:txBody>
-      </p:sp>
-      <p:sp>
-        <p:nvSpPr>
-          <p:cNvPr id="9" name="TextBox 8"/>
+              <a:rPr sz="1600" b="0">
+                <a:solidFill>
+                  <a:srgbClr val="FFE080"/>
+                </a:solidFill>
+                <a:latin typeface="Noto Sans JP"/>
+              </a:rPr>
+              <a:t>▸  予約ダッシュボード・KPIカード・CSV/PDF</a:t>
+            </a:r>
+          </a:p>
+        </p:txBody>
+      </p:sp>
+      <p:sp>
+        <p:nvSpPr>
+          <p:cNvPr id="8" name="TextBox 7"/>
           <p:cNvSpPr txBox="1"/>
           <p:nvPr/>
         </p:nvSpPr>
         <p:spPr>
           <a:xfrm>
-            <a:off x="228600" y="1188720"/>
-            <a:ext cx="3657600" cy="5440680"/>
+            <a:off x="731520" y="4480560"/>
+            <a:ext cx="9144000" cy="411480"/>
           </a:xfrm>
           <a:prstGeom prst="rect">
             <a:avLst/>
@@ -4519,106 +4507,89 @@
           </a:bodyPr>
           <a:lstStyle/>
           <a:p>
-            <a:r>
-              <a:rPr sz="1500" b="1">
-                <a:solidFill>
-                  <a:srgbClr val="735763"/>
-                </a:solidFill>
-                <a:latin typeface="Noto Sans JP"/>
-              </a:rPr>
-              <a:t>ログイン方法</a:t>
-            </a:r>
-          </a:p>
-          <a:p>
-            <a:pPr lvl="1"/>
-            <a:r>
-              <a:rPr sz="1300">
-                <a:solidFill>
-                  <a:srgbClr val="3D2B1F"/>
-                </a:solidFill>
-                <a:latin typeface="Noto Sans JP"/>
-              </a:rPr>
-              <a:t>・メールアドレスとパスワードを入力</a:t>
-            </a:r>
-          </a:p>
-          <a:p>
-            <a:pPr lvl="1"/>
-            <a:r>
-              <a:rPr sz="1300">
-                <a:solidFill>
-                  <a:srgbClr val="3D2B1F"/>
-                </a:solidFill>
-                <a:latin typeface="Noto Sans JP"/>
-              </a:rPr>
-              <a:t>・「ログイン」ボタンをクリック</a:t>
-            </a:r>
-          </a:p>
-          <a:p>
-            <a:r>
-              <a:rPr sz="600"/>
-              <a:t/>
-            </a:r>
-          </a:p>
-          <a:p>
-            <a:r>
-              <a:rPr sz="1500" b="1">
-                <a:solidFill>
-                  <a:srgbClr val="735763"/>
-                </a:solidFill>
-                <a:latin typeface="Noto Sans JP"/>
-              </a:rPr>
-              <a:t>パスワード忘れた場合</a:t>
-            </a:r>
-          </a:p>
-          <a:p>
-            <a:pPr lvl="1"/>
-            <a:r>
-              <a:rPr sz="1300">
-                <a:solidFill>
-                  <a:srgbClr val="3D2B1F"/>
-                </a:solidFill>
-                <a:latin typeface="Noto Sans JP"/>
-              </a:rPr>
-              <a:t>・「パスワードを忘れた方」から</a:t>
-            </a:r>
-          </a:p>
-          <a:p>
-            <a:r>
-              <a:rPr sz="1300">
-                <a:solidFill>
-                  <a:srgbClr val="3D2B1F"/>
-                </a:solidFill>
-                <a:latin typeface="Noto Sans JP"/>
-              </a:rPr>
-              <a:t>　リセットメール送信</a:t>
-            </a:r>
-          </a:p>
-        </p:txBody>
-      </p:sp>
-      <p:pic>
-        <p:nvPicPr>
-          <p:cNvPr id="10" name="Picture 9" descr="08_login_page.png"/>
-          <p:cNvPicPr>
-            <a:picLocks noChangeAspect="1"/>
-          </p:cNvPicPr>
-          <p:nvPr/>
-        </p:nvPicPr>
-        <p:blipFill>
-          <a:blip r:embed="rId2"/>
-          <a:stretch>
-            <a:fillRect/>
-          </a:stretch>
-        </p:blipFill>
-        <p:spPr>
-          <a:xfrm>
-            <a:off x="4160520" y="1251585"/>
-            <a:ext cx="7845552" cy="4903470"/>
-          </a:xfrm>
-          <a:prstGeom prst="rect">
-            <a:avLst/>
-          </a:prstGeom>
-        </p:spPr>
-      </p:pic>
+            <a:pPr algn="l"/>
+            <a:r>
+              <a:rPr sz="1600" b="0">
+                <a:solidFill>
+                  <a:srgbClr val="FFE080"/>
+                </a:solidFill>
+                <a:latin typeface="Noto Sans JP"/>
+              </a:rPr>
+              <a:t>▸  設定（基本情報・営業時間・休日・お知らせ・アカウント）</a:t>
+            </a:r>
+          </a:p>
+        </p:txBody>
+      </p:sp>
+      <p:sp>
+        <p:nvSpPr>
+          <p:cNvPr id="9" name="TextBox 8"/>
+          <p:cNvSpPr txBox="1"/>
+          <p:nvPr/>
+        </p:nvSpPr>
+        <p:spPr>
+          <a:xfrm>
+            <a:off x="731520" y="4892040"/>
+            <a:ext cx="9144000" cy="411480"/>
+          </a:xfrm>
+          <a:prstGeom prst="rect">
+            <a:avLst/>
+          </a:prstGeom>
+          <a:noFill/>
+        </p:spPr>
+        <p:txBody>
+          <a:bodyPr wrap="square">
+            <a:spAutoFit/>
+          </a:bodyPr>
+          <a:lstStyle/>
+          <a:p>
+            <a:pPr algn="l"/>
+            <a:r>
+              <a:rPr sz="1600" b="0">
+                <a:solidFill>
+                  <a:srgbClr val="FFE080"/>
+                </a:solidFill>
+                <a:latin typeface="Noto Sans JP"/>
+              </a:rPr>
+              <a:t>▸  ユーザー管理・パスワード変更</a:t>
+            </a:r>
+          </a:p>
+        </p:txBody>
+      </p:sp>
+      <p:sp>
+        <p:nvSpPr>
+          <p:cNvPr id="10" name="TextBox 9"/>
+          <p:cNvSpPr txBox="1"/>
+          <p:nvPr/>
+        </p:nvSpPr>
+        <p:spPr>
+          <a:xfrm>
+            <a:off x="731520" y="5303520"/>
+            <a:ext cx="9144000" cy="411480"/>
+          </a:xfrm>
+          <a:prstGeom prst="rect">
+            <a:avLst/>
+          </a:prstGeom>
+          <a:noFill/>
+        </p:spPr>
+        <p:txBody>
+          <a:bodyPr wrap="square">
+            <a:spAutoFit/>
+          </a:bodyPr>
+          <a:lstStyle/>
+          <a:p>
+            <a:pPr algn="l"/>
+            <a:r>
+              <a:rPr sz="1600" b="0">
+                <a:solidFill>
+                  <a:srgbClr val="FFE080"/>
+                </a:solidFill>
+                <a:latin typeface="Noto Sans JP"/>
+              </a:rPr>
+              <a:t>▸  リマインダーメール</a:t>
+            </a:r>
+          </a:p>
+        </p:txBody>
+      </p:sp>
     </p:spTree>
   </p:cSld>
   <p:clrMapOvr>
@@ -4695,7 +4666,7 @@
             <a:avLst/>
           </a:prstGeom>
           <a:solidFill>
-            <a:srgbClr val="735763"/>
+            <a:srgbClr val="1A2B4A"/>
           </a:solidFill>
           <a:ln>
             <a:noFill/>
@@ -4753,7 +4724,7 @@
                 </a:solidFill>
                 <a:latin typeface="Noto Sans JP"/>
               </a:rPr>
-              <a:t>予約ダッシュボード</a:t>
+              <a:t>管理者ログイン（/login）</a:t>
             </a:r>
           </a:p>
         </p:txBody>
@@ -4766,14 +4737,14 @@
         </p:nvSpPr>
         <p:spPr>
           <a:xfrm>
-            <a:off x="9994392" y="91440"/>
-            <a:ext cx="2011680" cy="411480"/>
+            <a:off x="9811512" y="91440"/>
+            <a:ext cx="2194560" cy="411480"/>
           </a:xfrm>
           <a:prstGeom prst="rect">
             <a:avLst/>
           </a:prstGeom>
           <a:solidFill>
-            <a:srgbClr val="735763"/>
+            <a:srgbClr val="1A2B4A"/>
           </a:solidFill>
           <a:ln>
             <a:noFill/>
@@ -4809,8 +4780,8 @@
         </p:nvSpPr>
         <p:spPr>
           <a:xfrm>
-            <a:off x="9994392" y="91440"/>
-            <a:ext cx="2011680" cy="411480"/>
+            <a:off x="9811512" y="91440"/>
+            <a:ext cx="2194560" cy="411480"/>
           </a:xfrm>
           <a:prstGeom prst="rect">
             <a:avLst/>
@@ -4827,7 +4798,7 @@
             <a:r>
               <a:rPr sz="1300" b="1">
                 <a:solidFill>
-                  <a:srgbClr val="FFFFFF"/>
+                  <a:srgbClr val="1A2B4A"/>
                 </a:solidFill>
                 <a:latin typeface="Noto Sans JP"/>
               </a:rPr>
@@ -4851,7 +4822,7 @@
             <a:avLst/>
           </a:prstGeom>
           <a:solidFill>
-            <a:srgbClr val="FCF0DE"/>
+            <a:srgbClr val="F8F5EE"/>
           </a:solidFill>
           <a:ln>
             <a:noFill/>
@@ -4903,13 +4874,13 @@
           <a:p>
             <a:pPr algn="l"/>
             <a:r>
-              <a:rPr sz="1300" b="0">
-                <a:solidFill>
-                  <a:srgbClr val="8B7355"/>
-                </a:solidFill>
-                <a:latin typeface="Noto Sans JP"/>
-              </a:rPr>
-              <a:t>本日の予約を一括管理</a:t>
+              <a:rPr sz="1200" b="0">
+                <a:solidFill>
+                  <a:srgbClr val="6B7C9E"/>
+                </a:solidFill>
+                <a:latin typeface="Noto Sans JP"/>
+              </a:rPr>
+              <a:t>管理画面へのアクセス</a:t>
             </a:r>
           </a:p>
         </p:txBody>
@@ -4937,85 +4908,131 @@
           <a:lstStyle/>
           <a:p>
             <a:r>
-              <a:rPr sz="1500" b="1">
-                <a:solidFill>
-                  <a:srgbClr val="735763"/>
-                </a:solidFill>
-                <a:latin typeface="Noto Sans JP"/>
-              </a:rPr>
-              <a:t>ダッシュボード概要</a:t>
-            </a:r>
-          </a:p>
-          <a:p>
-            <a:pPr lvl="1"/>
+              <a:rPr sz="1400" b="1">
+                <a:solidFill>
+                  <a:srgbClr val="1A2B4A"/>
+                </a:solidFill>
+                <a:latin typeface="Noto Sans JP"/>
+              </a:rPr>
+              <a:t>ログイン方法</a:t>
+            </a:r>
+          </a:p>
+          <a:p>
             <a:r>
               <a:rPr sz="1300">
                 <a:solidFill>
-                  <a:srgbClr val="3D2B1F"/>
-                </a:solidFill>
-                <a:latin typeface="Noto Sans JP"/>
-              </a:rPr>
-              <a:t>・本日の予約一覧が表示</a:t>
-            </a:r>
-          </a:p>
-          <a:p>
-            <a:pPr lvl="1"/>
+                  <a:srgbClr val="1A2B4A"/>
+                </a:solidFill>
+                <a:latin typeface="Noto Sans JP"/>
+              </a:rPr>
+              <a:t>・メールアドレスとパスワードを入力</a:t>
+            </a:r>
+          </a:p>
+          <a:p>
             <a:r>
               <a:rPr sz="1300">
                 <a:solidFill>
-                  <a:srgbClr val="3D2B1F"/>
-                </a:solidFill>
-                <a:latin typeface="Noto Sans JP"/>
-              </a:rPr>
-              <a:t>・患者名・時間・ステータスを一覧確認</a:t>
-            </a:r>
-          </a:p>
-          <a:p>
-            <a:r>
-              <a:rPr sz="600"/>
+                  <a:srgbClr val="1A2B4A"/>
+                </a:solidFill>
+                <a:latin typeface="Noto Sans JP"/>
+              </a:rPr>
+              <a:t>・「ログイン」ボタンをクリック</a:t>
+            </a:r>
+          </a:p>
+          <a:p>
+            <a:r>
+              <a:rPr sz="500"/>
               <a:t/>
             </a:r>
           </a:p>
           <a:p>
             <a:r>
-              <a:rPr sz="1500" b="1">
-                <a:solidFill>
-                  <a:srgbClr val="735763"/>
-                </a:solidFill>
-                <a:latin typeface="Noto Sans JP"/>
-              </a:rPr>
-              <a:t>操作</a:t>
-            </a:r>
-          </a:p>
-          <a:p>
-            <a:pPr lvl="1"/>
+              <a:rPr sz="1400" b="1">
+                <a:solidFill>
+                  <a:srgbClr val="1A2B4A"/>
+                </a:solidFill>
+                <a:latin typeface="Noto Sans JP"/>
+              </a:rPr>
+              <a:t>初回ログイン</a:t>
+            </a:r>
+          </a:p>
+          <a:p>
             <a:r>
               <a:rPr sz="1300">
                 <a:solidFill>
-                  <a:srgbClr val="3D2B1F"/>
-                </a:solidFill>
-                <a:latin typeface="Noto Sans JP"/>
-              </a:rPr>
-              <a:t>・行をクリックで詳細モーダル表示</a:t>
-            </a:r>
-          </a:p>
-          <a:p>
-            <a:pPr lvl="1"/>
+                  <a:srgbClr val="1A2B4A"/>
+                </a:solidFill>
+                <a:latin typeface="Noto Sans JP"/>
+              </a:rPr>
+              <a:t>・初回は仮パスワードを使用</a:t>
+            </a:r>
+          </a:p>
+          <a:p>
             <a:r>
               <a:rPr sz="1300">
                 <a:solidFill>
-                  <a:srgbClr val="3D2B1F"/>
-                </a:solidFill>
-                <a:latin typeface="Noto Sans JP"/>
-              </a:rPr>
-              <a:t>・CSV 出力・PDF 印刷に対応</a:t>
+                  <a:srgbClr val="1A2B4A"/>
+                </a:solidFill>
+                <a:latin typeface="Noto Sans JP"/>
+              </a:rPr>
+              <a:t>・ログイン後、パスワード変更画面に</a:t>
+            </a:r>
+          </a:p>
+          <a:p>
+            <a:r>
+              <a:rPr sz="1300">
+                <a:solidFill>
+                  <a:srgbClr val="1A2B4A"/>
+                </a:solidFill>
+                <a:latin typeface="Noto Sans JP"/>
+              </a:rPr>
+              <a:t>　自動リダイレクト（強制変更）</a:t>
+            </a:r>
+          </a:p>
+          <a:p>
+            <a:r>
+              <a:rPr sz="500"/>
+              <a:t/>
+            </a:r>
+          </a:p>
+          <a:p>
+            <a:r>
+              <a:rPr sz="1400" b="1">
+                <a:solidFill>
+                  <a:srgbClr val="1A2B4A"/>
+                </a:solidFill>
+                <a:latin typeface="Noto Sans JP"/>
+              </a:rPr>
+              <a:t>パスワードを忘れた場合</a:t>
+            </a:r>
+          </a:p>
+          <a:p>
+            <a:r>
+              <a:rPr sz="1300">
+                <a:solidFill>
+                  <a:srgbClr val="1A2B4A"/>
+                </a:solidFill>
+                <a:latin typeface="Noto Sans JP"/>
+              </a:rPr>
+              <a:t>・「パスワードを忘れた方」リンクから</a:t>
+            </a:r>
+          </a:p>
+          <a:p>
+            <a:r>
+              <a:rPr sz="1300">
+                <a:solidFill>
+                  <a:srgbClr val="1A2B4A"/>
+                </a:solidFill>
+                <a:latin typeface="Noto Sans JP"/>
+              </a:rPr>
+              <a:t>　リセットメールを送信</a:t>
             </a:r>
           </a:p>
         </p:txBody>
       </p:sp>
       <p:pic>
         <p:nvPicPr>
-          <p:cNvPr id="10" name="Picture 9" descr="09_dashboard.png"/>
+          <p:cNvPr id="10" name="Picture 9" descr="08_login_page.png"/>
           <p:cNvPicPr>
             <a:picLocks noChangeAspect="1"/>
           </p:cNvPicPr>
@@ -5113,7 +5130,7 @@
             <a:avLst/>
           </a:prstGeom>
           <a:solidFill>
-            <a:srgbClr val="735763"/>
+            <a:srgbClr val="1A2B4A"/>
           </a:solidFill>
           <a:ln>
             <a:noFill/>
@@ -5171,7 +5188,7 @@
                 </a:solidFill>
                 <a:latin typeface="Noto Sans JP"/>
               </a:rPr>
-              <a:t>予約詳細モーダル</a:t>
+              <a:t>予約ダッシュボード（/admin）</a:t>
             </a:r>
           </a:p>
         </p:txBody>
@@ -5184,14 +5201,14 @@
         </p:nvSpPr>
         <p:spPr>
           <a:xfrm>
-            <a:off x="9994392" y="91440"/>
-            <a:ext cx="2011680" cy="411480"/>
+            <a:off x="9811512" y="91440"/>
+            <a:ext cx="2194560" cy="411480"/>
           </a:xfrm>
           <a:prstGeom prst="rect">
             <a:avLst/>
           </a:prstGeom>
           <a:solidFill>
-            <a:srgbClr val="735763"/>
+            <a:srgbClr val="1A2B4A"/>
           </a:solidFill>
           <a:ln>
             <a:noFill/>
@@ -5227,8 +5244,8 @@
         </p:nvSpPr>
         <p:spPr>
           <a:xfrm>
-            <a:off x="9994392" y="91440"/>
-            <a:ext cx="2011680" cy="411480"/>
+            <a:off x="9811512" y="91440"/>
+            <a:ext cx="2194560" cy="411480"/>
           </a:xfrm>
           <a:prstGeom prst="rect">
             <a:avLst/>
@@ -5245,7 +5262,7 @@
             <a:r>
               <a:rPr sz="1300" b="1">
                 <a:solidFill>
-                  <a:srgbClr val="FFFFFF"/>
+                  <a:srgbClr val="1A2B4A"/>
                 </a:solidFill>
                 <a:latin typeface="Noto Sans JP"/>
               </a:rPr>
@@ -5269,7 +5286,7 @@
             <a:avLst/>
           </a:prstGeom>
           <a:solidFill>
-            <a:srgbClr val="FCF0DE"/>
+            <a:srgbClr val="F8F5EE"/>
           </a:solidFill>
           <a:ln>
             <a:noFill/>
@@ -5321,13 +5338,13 @@
           <a:p>
             <a:pPr algn="l"/>
             <a:r>
-              <a:rPr sz="1300" b="0">
-                <a:solidFill>
-                  <a:srgbClr val="8B7355"/>
-                </a:solidFill>
-                <a:latin typeface="Noto Sans JP"/>
-              </a:rPr>
-              <a:t>予約情報の確認と更新</a:t>
+              <a:rPr sz="1200" b="0">
+                <a:solidFill>
+                  <a:srgbClr val="6B7C9E"/>
+                </a:solidFill>
+                <a:latin typeface="Noto Sans JP"/>
+              </a:rPr>
+              <a:t>予約の一括管理</a:t>
             </a:r>
           </a:p>
         </p:txBody>
@@ -5355,85 +5372,120 @@
           <a:lstStyle/>
           <a:p>
             <a:r>
-              <a:rPr sz="1500" b="1">
-                <a:solidFill>
-                  <a:srgbClr val="735763"/>
-                </a:solidFill>
-                <a:latin typeface="Noto Sans JP"/>
-              </a:rPr>
-              <a:t>詳細情報</a:t>
-            </a:r>
-          </a:p>
-          <a:p>
-            <a:pPr lvl="1"/>
+              <a:rPr sz="1400" b="1">
+                <a:solidFill>
+                  <a:srgbClr val="1A2B4A"/>
+                </a:solidFill>
+                <a:latin typeface="Noto Sans JP"/>
+              </a:rPr>
+              <a:t>KPI カード</a:t>
+            </a:r>
+          </a:p>
+          <a:p>
             <a:r>
               <a:rPr sz="1300">
                 <a:solidFill>
-                  <a:srgbClr val="3D2B1F"/>
-                </a:solidFill>
-                <a:latin typeface="Noto Sans JP"/>
-              </a:rPr>
-              <a:t>・予約者の全情報を確認</a:t>
-            </a:r>
-          </a:p>
-          <a:p>
-            <a:pPr lvl="1"/>
+                  <a:srgbClr val="1A2B4A"/>
+                </a:solidFill>
+                <a:latin typeface="Noto Sans JP"/>
+              </a:rPr>
+              <a:t>・本日 / 今月 / 新規 / 未確認</a:t>
+            </a:r>
+          </a:p>
+          <a:p>
             <a:r>
               <a:rPr sz="1300">
                 <a:solidFill>
-                  <a:srgbClr val="3D2B1F"/>
-                </a:solidFill>
-                <a:latin typeface="Noto Sans JP"/>
-              </a:rPr>
-              <a:t>・症状・伝達事項を確認</a:t>
-            </a:r>
-          </a:p>
-          <a:p>
-            <a:r>
-              <a:rPr sz="600"/>
+                  <a:srgbClr val="1A2B4A"/>
+                </a:solidFill>
+                <a:latin typeface="Noto Sans JP"/>
+              </a:rPr>
+              <a:t>・クリックで一覧を絞り込み</a:t>
+            </a:r>
+          </a:p>
+          <a:p>
+            <a:r>
+              <a:rPr sz="500"/>
               <a:t/>
             </a:r>
           </a:p>
           <a:p>
             <a:r>
-              <a:rPr sz="1500" b="1">
-                <a:solidFill>
-                  <a:srgbClr val="735763"/>
-                </a:solidFill>
-                <a:latin typeface="Noto Sans JP"/>
-              </a:rPr>
-              <a:t>ステータス変更</a:t>
-            </a:r>
-          </a:p>
-          <a:p>
-            <a:pPr lvl="1"/>
+              <a:rPr sz="1400" b="1">
+                <a:solidFill>
+                  <a:srgbClr val="1A2B4A"/>
+                </a:solidFill>
+                <a:latin typeface="Noto Sans JP"/>
+              </a:rPr>
+              <a:t>予約一覧</a:t>
+            </a:r>
+          </a:p>
+          <a:p>
             <a:r>
               <a:rPr sz="1300">
                 <a:solidFill>
-                  <a:srgbClr val="3D2B1F"/>
-                </a:solidFill>
-                <a:latin typeface="Noto Sans JP"/>
-              </a:rPr>
-              <a:t>・対応済み / キャンセル に変更可</a:t>
-            </a:r>
-          </a:p>
-          <a:p>
-            <a:pPr lvl="1"/>
+                  <a:srgbClr val="1A2B4A"/>
+                </a:solidFill>
+                <a:latin typeface="Noto Sans JP"/>
+              </a:rPr>
+              <a:t>・ステータス・日付・キーワードで絞り込み</a:t>
+            </a:r>
+          </a:p>
+          <a:p>
             <a:r>
               <a:rPr sz="1300">
                 <a:solidFill>
-                  <a:srgbClr val="3D2B1F"/>
-                </a:solidFill>
-                <a:latin typeface="Noto Sans JP"/>
-              </a:rPr>
-              <a:t>・変更は即時 Firestore に反映</a:t>
+                  <a:srgbClr val="1A2B4A"/>
+                </a:solidFill>
+                <a:latin typeface="Noto Sans JP"/>
+              </a:rPr>
+              <a:t>・行クリックで詳細モーダル表示</a:t>
+            </a:r>
+          </a:p>
+          <a:p>
+            <a:r>
+              <a:rPr sz="500"/>
+              <a:t/>
+            </a:r>
+          </a:p>
+          <a:p>
+            <a:r>
+              <a:rPr sz="1400" b="1">
+                <a:solidFill>
+                  <a:srgbClr val="1A2B4A"/>
+                </a:solidFill>
+                <a:latin typeface="Noto Sans JP"/>
+              </a:rPr>
+              <a:t>エクスポート</a:t>
+            </a:r>
+          </a:p>
+          <a:p>
+            <a:r>
+              <a:rPr sz="1300">
+                <a:solidFill>
+                  <a:srgbClr val="1A2B4A"/>
+                </a:solidFill>
+                <a:latin typeface="Noto Sans JP"/>
+              </a:rPr>
+              <a:t>・CSV ダウンロード</a:t>
+            </a:r>
+          </a:p>
+          <a:p>
+            <a:r>
+              <a:rPr sz="1300">
+                <a:solidFill>
+                  <a:srgbClr val="1A2B4A"/>
+                </a:solidFill>
+                <a:latin typeface="Noto Sans JP"/>
+              </a:rPr>
+              <a:t>・PDF 印刷（pdf-lib 使用）</a:t>
             </a:r>
           </a:p>
         </p:txBody>
       </p:sp>
       <p:pic>
         <p:nvPicPr>
-          <p:cNvPr id="10" name="Picture 9" descr="10_reservation_detail_modal.png"/>
+          <p:cNvPr id="10" name="Picture 9" descr="09_dashboard.png"/>
           <p:cNvPicPr>
             <a:picLocks noChangeAspect="1"/>
           </p:cNvPicPr>
@@ -5531,7 +5583,7 @@
             <a:avLst/>
           </a:prstGeom>
           <a:solidFill>
-            <a:srgbClr val="735763"/>
+            <a:srgbClr val="1A2B4A"/>
           </a:solidFill>
           <a:ln>
             <a:noFill/>
@@ -5589,7 +5641,7 @@
                 </a:solidFill>
                 <a:latin typeface="Noto Sans JP"/>
               </a:rPr>
-              <a:t>設定 - 院内情報</a:t>
+              <a:t>予約詳細モーダル</a:t>
             </a:r>
           </a:p>
         </p:txBody>
@@ -5602,14 +5654,14 @@
         </p:nvSpPr>
         <p:spPr>
           <a:xfrm>
-            <a:off x="9994392" y="91440"/>
-            <a:ext cx="2011680" cy="411480"/>
+            <a:off x="9811512" y="91440"/>
+            <a:ext cx="2194560" cy="411480"/>
           </a:xfrm>
           <a:prstGeom prst="rect">
             <a:avLst/>
           </a:prstGeom>
           <a:solidFill>
-            <a:srgbClr val="735763"/>
+            <a:srgbClr val="1A2B4A"/>
           </a:solidFill>
           <a:ln>
             <a:noFill/>
@@ -5645,8 +5697,8 @@
         </p:nvSpPr>
         <p:spPr>
           <a:xfrm>
-            <a:off x="9994392" y="91440"/>
-            <a:ext cx="2011680" cy="411480"/>
+            <a:off x="9811512" y="91440"/>
+            <a:ext cx="2194560" cy="411480"/>
           </a:xfrm>
           <a:prstGeom prst="rect">
             <a:avLst/>
@@ -5663,7 +5715,7 @@
             <a:r>
               <a:rPr sz="1300" b="1">
                 <a:solidFill>
-                  <a:srgbClr val="FFFFFF"/>
+                  <a:srgbClr val="1A2B4A"/>
                 </a:solidFill>
                 <a:latin typeface="Noto Sans JP"/>
               </a:rPr>
@@ -5687,7 +5739,7 @@
             <a:avLst/>
           </a:prstGeom>
           <a:solidFill>
-            <a:srgbClr val="FCF0DE"/>
+            <a:srgbClr val="F8F5EE"/>
           </a:solidFill>
           <a:ln>
             <a:noFill/>
@@ -5739,13 +5791,13 @@
           <a:p>
             <a:pPr algn="l"/>
             <a:r>
-              <a:rPr sz="1300" b="0">
-                <a:solidFill>
-                  <a:srgbClr val="8B7355"/>
-                </a:solidFill>
-                <a:latin typeface="Noto Sans JP"/>
-              </a:rPr>
-              <a:t>クリニック基本情報の管理</a:t>
+              <a:rPr sz="1200" b="0">
+                <a:solidFill>
+                  <a:srgbClr val="6B7C9E"/>
+                </a:solidFill>
+                <a:latin typeface="Noto Sans JP"/>
+              </a:rPr>
+              <a:t>予約情報の確認と更新</a:t>
             </a:r>
           </a:p>
         </p:txBody>
@@ -5773,73 +5825,92 @@
           <a:lstStyle/>
           <a:p>
             <a:r>
-              <a:rPr sz="1500" b="1">
-                <a:solidFill>
-                  <a:srgbClr val="735763"/>
-                </a:solidFill>
-                <a:latin typeface="Noto Sans JP"/>
-              </a:rPr>
-              <a:t>院内情報の編集</a:t>
-            </a:r>
-          </a:p>
-          <a:p>
-            <a:pPr lvl="1"/>
+              <a:rPr sz="1400" b="1">
+                <a:solidFill>
+                  <a:srgbClr val="1A2B4A"/>
+                </a:solidFill>
+                <a:latin typeface="Noto Sans JP"/>
+              </a:rPr>
+              <a:t>詳細情報</a:t>
+            </a:r>
+          </a:p>
+          <a:p>
             <a:r>
               <a:rPr sz="1300">
                 <a:solidFill>
-                  <a:srgbClr val="3D2B1F"/>
-                </a:solidFill>
-                <a:latin typeface="Noto Sans JP"/>
-              </a:rPr>
-              <a:t>・院名・住所・電話番号を設定</a:t>
-            </a:r>
-          </a:p>
-          <a:p>
-            <a:pPr lvl="1"/>
+                  <a:srgbClr val="1A2B4A"/>
+                </a:solidFill>
+                <a:latin typeface="Noto Sans JP"/>
+              </a:rPr>
+              <a:t>・予約者の全情報を確認</a:t>
+            </a:r>
+          </a:p>
+          <a:p>
             <a:r>
               <a:rPr sz="1300">
                 <a:solidFill>
-                  <a:srgbClr val="3D2B1F"/>
-                </a:solidFill>
-                <a:latin typeface="Noto Sans JP"/>
-              </a:rPr>
-              <a:t>・トップページに表示される情報</a:t>
-            </a:r>
-          </a:p>
-          <a:p>
-            <a:r>
-              <a:rPr sz="600"/>
+                  <a:srgbClr val="1A2B4A"/>
+                </a:solidFill>
+                <a:latin typeface="Noto Sans JP"/>
+              </a:rPr>
+              <a:t>・症状・伝達事項を確認</a:t>
+            </a:r>
+          </a:p>
+          <a:p>
+            <a:r>
+              <a:rPr sz="500"/>
               <a:t/>
             </a:r>
           </a:p>
           <a:p>
             <a:r>
-              <a:rPr sz="1500" b="1">
-                <a:solidFill>
-                  <a:srgbClr val="735763"/>
-                </a:solidFill>
-                <a:latin typeface="Noto Sans JP"/>
-              </a:rPr>
-              <a:t>保存</a:t>
-            </a:r>
-          </a:p>
-          <a:p>
-            <a:pPr lvl="1"/>
+              <a:rPr sz="1400" b="1">
+                <a:solidFill>
+                  <a:srgbClr val="1A2B4A"/>
+                </a:solidFill>
+                <a:latin typeface="Noto Sans JP"/>
+              </a:rPr>
+              <a:t>ステータス変更</a:t>
+            </a:r>
+          </a:p>
+          <a:p>
             <a:r>
               <a:rPr sz="1300">
                 <a:solidFill>
-                  <a:srgbClr val="3D2B1F"/>
-                </a:solidFill>
-                <a:latin typeface="Noto Sans JP"/>
-              </a:rPr>
-              <a:t>・「保存」ボタンで即時反映</a:t>
+                  <a:srgbClr val="1A2B4A"/>
+                </a:solidFill>
+                <a:latin typeface="Noto Sans JP"/>
+              </a:rPr>
+              <a:t>・「確認済み」に変更</a:t>
+            </a:r>
+          </a:p>
+          <a:p>
+            <a:r>
+              <a:rPr sz="1300">
+                <a:solidFill>
+                  <a:srgbClr val="1A2B4A"/>
+                </a:solidFill>
+                <a:latin typeface="Noto Sans JP"/>
+              </a:rPr>
+              <a:t>・「キャンセル」に変更</a:t>
+            </a:r>
+          </a:p>
+          <a:p>
+            <a:r>
+              <a:rPr sz="1300">
+                <a:solidFill>
+                  <a:srgbClr val="1A2B4A"/>
+                </a:solidFill>
+                <a:latin typeface="Noto Sans JP"/>
+              </a:rPr>
+              <a:t>・変更は即時 Firestore に反映</a:t>
             </a:r>
           </a:p>
         </p:txBody>
       </p:sp>
       <p:pic>
         <p:nvPicPr>
-          <p:cNvPr id="10" name="Picture 9" descr="11_settings_clinic_info.png"/>
+          <p:cNvPr id="10" name="Picture 9" descr="10_reservation_detail_modal.png"/>
           <p:cNvPicPr>
             <a:picLocks noChangeAspect="1"/>
           </p:cNvPicPr>
@@ -5937,7 +6008,7 @@
             <a:avLst/>
           </a:prstGeom>
           <a:solidFill>
-            <a:srgbClr val="735763"/>
+            <a:srgbClr val="1A2B4A"/>
           </a:solidFill>
           <a:ln>
             <a:noFill/>
@@ -5995,7 +6066,7 @@
                 </a:solidFill>
                 <a:latin typeface="Noto Sans JP"/>
               </a:rPr>
-              <a:t>設定 - 営業時間</a:t>
+              <a:t>設定 - 基本情報（/admin/settings）</a:t>
             </a:r>
           </a:p>
         </p:txBody>
@@ -6008,14 +6079,14 @@
         </p:nvSpPr>
         <p:spPr>
           <a:xfrm>
-            <a:off x="9994392" y="91440"/>
-            <a:ext cx="2011680" cy="411480"/>
+            <a:off x="9811512" y="91440"/>
+            <a:ext cx="2194560" cy="411480"/>
           </a:xfrm>
           <a:prstGeom prst="rect">
             <a:avLst/>
           </a:prstGeom>
           <a:solidFill>
-            <a:srgbClr val="735763"/>
+            <a:srgbClr val="1A2B4A"/>
           </a:solidFill>
           <a:ln>
             <a:noFill/>
@@ -6051,8 +6122,8 @@
         </p:nvSpPr>
         <p:spPr>
           <a:xfrm>
-            <a:off x="9994392" y="91440"/>
-            <a:ext cx="2011680" cy="411480"/>
+            <a:off x="9811512" y="91440"/>
+            <a:ext cx="2194560" cy="411480"/>
           </a:xfrm>
           <a:prstGeom prst="rect">
             <a:avLst/>
@@ -6069,7 +6140,7 @@
             <a:r>
               <a:rPr sz="1300" b="1">
                 <a:solidFill>
-                  <a:srgbClr val="FFFFFF"/>
+                  <a:srgbClr val="1A2B4A"/>
                 </a:solidFill>
                 <a:latin typeface="Noto Sans JP"/>
               </a:rPr>
@@ -6093,7 +6164,7 @@
             <a:avLst/>
           </a:prstGeom>
           <a:solidFill>
-            <a:srgbClr val="FCF0DE"/>
+            <a:srgbClr val="F8F5EE"/>
           </a:solidFill>
           <a:ln>
             <a:noFill/>
@@ -6145,13 +6216,13 @@
           <a:p>
             <a:pPr algn="l"/>
             <a:r>
-              <a:rPr sz="1300" b="0">
-                <a:solidFill>
-                  <a:srgbClr val="8B7355"/>
-                </a:solidFill>
-                <a:latin typeface="Noto Sans JP"/>
-              </a:rPr>
-              <a:t>予約受付時間の設定</a:t>
+              <a:rPr sz="1200" b="0">
+                <a:solidFill>
+                  <a:srgbClr val="6B7C9E"/>
+                </a:solidFill>
+                <a:latin typeface="Noto Sans JP"/>
+              </a:rPr>
+              <a:t>クリニック基本情報の管理</a:t>
             </a:r>
           </a:p>
         </p:txBody>
@@ -6179,56 +6250,103 @@
           <a:lstStyle/>
           <a:p>
             <a:r>
-              <a:rPr sz="1500" b="1">
-                <a:solidFill>
-                  <a:srgbClr val="735763"/>
-                </a:solidFill>
-                <a:latin typeface="Noto Sans JP"/>
-              </a:rPr>
-              <a:t>営業時間の設定</a:t>
-            </a:r>
-          </a:p>
-          <a:p>
-            <a:pPr lvl="1"/>
+              <a:rPr sz="1400" b="1">
+                <a:solidFill>
+                  <a:srgbClr val="1A2B4A"/>
+                </a:solidFill>
+                <a:latin typeface="Noto Sans JP"/>
+              </a:rPr>
+              <a:t>設定項目</a:t>
+            </a:r>
+          </a:p>
+          <a:p>
             <a:r>
               <a:rPr sz="1300">
                 <a:solidFill>
-                  <a:srgbClr val="3D2B1F"/>
-                </a:solidFill>
-                <a:latin typeface="Noto Sans JP"/>
-              </a:rPr>
-              <a:t>・曜日ごとに ON/OFF 切り替え</a:t>
-            </a:r>
-          </a:p>
-          <a:p>
-            <a:pPr lvl="1"/>
+                  <a:srgbClr val="1A2B4A"/>
+                </a:solidFill>
+                <a:latin typeface="Noto Sans JP"/>
+              </a:rPr>
+              <a:t>・院名（必須）</a:t>
+            </a:r>
+          </a:p>
+          <a:p>
             <a:r>
               <a:rPr sz="1300">
                 <a:solidFill>
-                  <a:srgbClr val="3D2B1F"/>
-                </a:solidFill>
-                <a:latin typeface="Noto Sans JP"/>
-              </a:rPr>
-              <a:t>・開始・終了時間を入力</a:t>
-            </a:r>
-          </a:p>
-          <a:p>
-            <a:pPr lvl="1"/>
+                  <a:srgbClr val="1A2B4A"/>
+                </a:solidFill>
+                <a:latin typeface="Noto Sans JP"/>
+              </a:rPr>
+              <a:t>・住所</a:t>
+            </a:r>
+          </a:p>
+          <a:p>
             <a:r>
               <a:rPr sz="1300">
                 <a:solidFill>
-                  <a:srgbClr val="3D2B1F"/>
-                </a:solidFill>
-                <a:latin typeface="Noto Sans JP"/>
-              </a:rPr>
-              <a:t>・カレンダーの予約可否に即反映</a:t>
+                  <a:srgbClr val="1A2B4A"/>
+                </a:solidFill>
+                <a:latin typeface="Noto Sans JP"/>
+              </a:rPr>
+              <a:t>・電話番号（必須）</a:t>
+            </a:r>
+          </a:p>
+          <a:p>
+            <a:r>
+              <a:rPr sz="1300">
+                <a:solidFill>
+                  <a:srgbClr val="1A2B4A"/>
+                </a:solidFill>
+                <a:latin typeface="Noto Sans JP"/>
+              </a:rPr>
+              <a:t>・その他情報</a:t>
+            </a:r>
+          </a:p>
+          <a:p>
+            <a:r>
+              <a:rPr sz="500"/>
+              <a:t/>
+            </a:r>
+          </a:p>
+          <a:p>
+            <a:r>
+              <a:rPr sz="1400" b="1">
+                <a:solidFill>
+                  <a:srgbClr val="1A2B4A"/>
+                </a:solidFill>
+                <a:latin typeface="Noto Sans JP"/>
+              </a:rPr>
+              <a:t>保存</a:t>
+            </a:r>
+          </a:p>
+          <a:p>
+            <a:r>
+              <a:rPr sz="1300">
+                <a:solidFill>
+                  <a:srgbClr val="1A2B4A"/>
+                </a:solidFill>
+                <a:latin typeface="Noto Sans JP"/>
+              </a:rPr>
+              <a:t>・「保存」ボタンで即時反映</a:t>
+            </a:r>
+          </a:p>
+          <a:p>
+            <a:r>
+              <a:rPr sz="1300">
+                <a:solidFill>
+                  <a:srgbClr val="1A2B4A"/>
+                </a:solidFill>
+                <a:latin typeface="Noto Sans JP"/>
+              </a:rPr>
+              <a:t>・トップページの院情報に連動</a:t>
             </a:r>
           </a:p>
         </p:txBody>
       </p:sp>
       <p:pic>
         <p:nvPicPr>
-          <p:cNvPr id="10" name="Picture 9" descr="12_settings_business_hours.png"/>
+          <p:cNvPr id="10" name="Picture 9" descr="11_settings_clinic_info.png"/>
           <p:cNvPicPr>
             <a:picLocks noChangeAspect="1"/>
           </p:cNvPicPr>
@@ -6326,7 +6444,7 @@
             <a:avLst/>
           </a:prstGeom>
           <a:solidFill>
-            <a:srgbClr val="735763"/>
+            <a:srgbClr val="1A2B4A"/>
           </a:solidFill>
           <a:ln>
             <a:noFill/>
@@ -6384,7 +6502,7 @@
                 </a:solidFill>
                 <a:latin typeface="Noto Sans JP"/>
               </a:rPr>
-              <a:t>設定 - 休日設定</a:t>
+              <a:t>設定 - 営業時間</a:t>
             </a:r>
           </a:p>
         </p:txBody>
@@ -6397,14 +6515,14 @@
         </p:nvSpPr>
         <p:spPr>
           <a:xfrm>
-            <a:off x="9994392" y="91440"/>
-            <a:ext cx="2011680" cy="411480"/>
+            <a:off x="9811512" y="91440"/>
+            <a:ext cx="2194560" cy="411480"/>
           </a:xfrm>
           <a:prstGeom prst="rect">
             <a:avLst/>
           </a:prstGeom>
           <a:solidFill>
-            <a:srgbClr val="735763"/>
+            <a:srgbClr val="1A2B4A"/>
           </a:solidFill>
           <a:ln>
             <a:noFill/>
@@ -6440,8 +6558,8 @@
         </p:nvSpPr>
         <p:spPr>
           <a:xfrm>
-            <a:off x="9994392" y="91440"/>
-            <a:ext cx="2011680" cy="411480"/>
+            <a:off x="9811512" y="91440"/>
+            <a:ext cx="2194560" cy="411480"/>
           </a:xfrm>
           <a:prstGeom prst="rect">
             <a:avLst/>
@@ -6458,7 +6576,7 @@
             <a:r>
               <a:rPr sz="1300" b="1">
                 <a:solidFill>
-                  <a:srgbClr val="FFFFFF"/>
+                  <a:srgbClr val="1A2B4A"/>
                 </a:solidFill>
                 <a:latin typeface="Noto Sans JP"/>
               </a:rPr>
@@ -6482,7 +6600,7 @@
             <a:avLst/>
           </a:prstGeom>
           <a:solidFill>
-            <a:srgbClr val="FCF0DE"/>
+            <a:srgbClr val="F8F5EE"/>
           </a:solidFill>
           <a:ln>
             <a:noFill/>
@@ -6534,13 +6652,13 @@
           <a:p>
             <a:pPr algn="l"/>
             <a:r>
-              <a:rPr sz="1300" b="0">
-                <a:solidFill>
-                  <a:srgbClr val="8B7355"/>
-                </a:solidFill>
-                <a:latin typeface="Noto Sans JP"/>
-              </a:rPr>
-              <a:t>休診日・祝日の登録</a:t>
+              <a:rPr sz="1200" b="0">
+                <a:solidFill>
+                  <a:srgbClr val="6B7C9E"/>
+                </a:solidFill>
+                <a:latin typeface="Noto Sans JP"/>
+              </a:rPr>
+              <a:t>予約受付時間の設定</a:t>
             </a:r>
           </a:p>
         </p:txBody>
@@ -6568,56 +6686,92 @@
           <a:lstStyle/>
           <a:p>
             <a:r>
-              <a:rPr sz="1500" b="1">
-                <a:solidFill>
-                  <a:srgbClr val="735763"/>
-                </a:solidFill>
-                <a:latin typeface="Noto Sans JP"/>
-              </a:rPr>
-              <a:t>休日の登録</a:t>
-            </a:r>
-          </a:p>
-          <a:p>
-            <a:pPr lvl="1"/>
+              <a:rPr sz="1400" b="1">
+                <a:solidFill>
+                  <a:srgbClr val="1A2B4A"/>
+                </a:solidFill>
+                <a:latin typeface="Noto Sans JP"/>
+              </a:rPr>
+              <a:t>設定方法</a:t>
+            </a:r>
+          </a:p>
+          <a:p>
             <a:r>
               <a:rPr sz="1300">
                 <a:solidFill>
-                  <a:srgbClr val="3D2B1F"/>
-                </a:solidFill>
-                <a:latin typeface="Noto Sans JP"/>
-              </a:rPr>
-              <a:t>・カレンダーから休日を選択</a:t>
-            </a:r>
-          </a:p>
-          <a:p>
-            <a:pPr lvl="1"/>
+                  <a:srgbClr val="1A2B4A"/>
+                </a:solidFill>
+                <a:latin typeface="Noto Sans JP"/>
+              </a:rPr>
+              <a:t>・曜日ごとに ON/OFF 切り替え</a:t>
+            </a:r>
+          </a:p>
+          <a:p>
             <a:r>
               <a:rPr sz="1300">
                 <a:solidFill>
-                  <a:srgbClr val="3D2B1F"/>
-                </a:solidFill>
-                <a:latin typeface="Noto Sans JP"/>
-              </a:rPr>
-              <a:t>・祝日名を任意入力可能</a:t>
-            </a:r>
-          </a:p>
-          <a:p>
-            <a:pPr lvl="1"/>
+                  <a:srgbClr val="1A2B4A"/>
+                </a:solidFill>
+                <a:latin typeface="Noto Sans JP"/>
+              </a:rPr>
+              <a:t>・開始・終了時間を入力</a:t>
+            </a:r>
+          </a:p>
+          <a:p>
+            <a:r>
+              <a:rPr sz="500"/>
+              <a:t/>
+            </a:r>
+          </a:p>
+          <a:p>
+            <a:r>
+              <a:rPr sz="1400" b="1">
+                <a:solidFill>
+                  <a:srgbClr val="1A2B4A"/>
+                </a:solidFill>
+                <a:latin typeface="Noto Sans JP"/>
+              </a:rPr>
+              <a:t>カレンダーへの反映</a:t>
+            </a:r>
+          </a:p>
+          <a:p>
             <a:r>
               <a:rPr sz="1300">
                 <a:solidFill>
-                  <a:srgbClr val="3D2B1F"/>
-                </a:solidFill>
-                <a:latin typeface="Noto Sans JP"/>
-              </a:rPr>
-              <a:t>・登録した日はカレンダーで予約不可に</a:t>
+                  <a:srgbClr val="1A2B4A"/>
+                </a:solidFill>
+                <a:latin typeface="Noto Sans JP"/>
+              </a:rPr>
+              <a:t>・設定後、即座に予約フォームに</a:t>
+            </a:r>
+          </a:p>
+          <a:p>
+            <a:r>
+              <a:rPr sz="1300">
+                <a:solidFill>
+                  <a:srgbClr val="1A2B4A"/>
+                </a:solidFill>
+                <a:latin typeface="Noto Sans JP"/>
+              </a:rPr>
+              <a:t>　反映される</a:t>
+            </a:r>
+          </a:p>
+          <a:p>
+            <a:r>
+              <a:rPr sz="1300">
+                <a:solidFill>
+                  <a:srgbClr val="1A2B4A"/>
+                </a:solidFill>
+                <a:latin typeface="Noto Sans JP"/>
+              </a:rPr>
+              <a:t>・OFF 設定日は予約不可に</a:t>
             </a:r>
           </a:p>
         </p:txBody>
       </p:sp>
       <p:pic>
         <p:nvPicPr>
-          <p:cNvPr id="10" name="Picture 9" descr="13_settings_holidays.png"/>
+          <p:cNvPr id="10" name="Picture 9" descr="12_settings_business_hours.png"/>
           <p:cNvPicPr>
             <a:picLocks noChangeAspect="1"/>
           </p:cNvPicPr>
@@ -6715,7 +6869,7 @@
             <a:avLst/>
           </a:prstGeom>
           <a:solidFill>
-            <a:srgbClr val="735763"/>
+            <a:srgbClr val="1A2B4A"/>
           </a:solidFill>
           <a:ln>
             <a:noFill/>
@@ -6773,7 +6927,7 @@
                 </a:solidFill>
                 <a:latin typeface="Noto Sans JP"/>
               </a:rPr>
-              <a:t>設定 - お知らせ</a:t>
+              <a:t>設定 - 休日設定</a:t>
             </a:r>
           </a:p>
         </p:txBody>
@@ -6786,14 +6940,14 @@
         </p:nvSpPr>
         <p:spPr>
           <a:xfrm>
-            <a:off x="9994392" y="91440"/>
-            <a:ext cx="2011680" cy="411480"/>
+            <a:off x="9811512" y="91440"/>
+            <a:ext cx="2194560" cy="411480"/>
           </a:xfrm>
           <a:prstGeom prst="rect">
             <a:avLst/>
           </a:prstGeom>
           <a:solidFill>
-            <a:srgbClr val="735763"/>
+            <a:srgbClr val="1A2B4A"/>
           </a:solidFill>
           <a:ln>
             <a:noFill/>
@@ -6829,8 +6983,8 @@
         </p:nvSpPr>
         <p:spPr>
           <a:xfrm>
-            <a:off x="9994392" y="91440"/>
-            <a:ext cx="2011680" cy="411480"/>
+            <a:off x="9811512" y="91440"/>
+            <a:ext cx="2194560" cy="411480"/>
           </a:xfrm>
           <a:prstGeom prst="rect">
             <a:avLst/>
@@ -6847,7 +7001,7 @@
             <a:r>
               <a:rPr sz="1300" b="1">
                 <a:solidFill>
-                  <a:srgbClr val="FFFFFF"/>
+                  <a:srgbClr val="1A2B4A"/>
                 </a:solidFill>
                 <a:latin typeface="Noto Sans JP"/>
               </a:rPr>
@@ -6871,7 +7025,7 @@
             <a:avLst/>
           </a:prstGeom>
           <a:solidFill>
-            <a:srgbClr val="FCF0DE"/>
+            <a:srgbClr val="F8F5EE"/>
           </a:solidFill>
           <a:ln>
             <a:noFill/>
@@ -6923,13 +7077,13 @@
           <a:p>
             <a:pPr algn="l"/>
             <a:r>
-              <a:rPr sz="1300" b="0">
-                <a:solidFill>
-                  <a:srgbClr val="8B7355"/>
-                </a:solidFill>
-                <a:latin typeface="Noto Sans JP"/>
-              </a:rPr>
-              <a:t>患者向けバナーメッセージ</a:t>
+              <a:rPr sz="1200" b="0">
+                <a:solidFill>
+                  <a:srgbClr val="6B7C9E"/>
+                </a:solidFill>
+                <a:latin typeface="Noto Sans JP"/>
+              </a:rPr>
+              <a:t>休診日・祝日の登録</a:t>
             </a:r>
           </a:p>
         </p:txBody>
@@ -6957,56 +7111,81 @@
           <a:lstStyle/>
           <a:p>
             <a:r>
-              <a:rPr sz="1500" b="1">
-                <a:solidFill>
-                  <a:srgbClr val="735763"/>
-                </a:solidFill>
-                <a:latin typeface="Noto Sans JP"/>
-              </a:rPr>
-              <a:t>お知らせ機能</a:t>
-            </a:r>
-          </a:p>
-          <a:p>
-            <a:pPr lvl="1"/>
+              <a:rPr sz="1400" b="1">
+                <a:solidFill>
+                  <a:srgbClr val="1A2B4A"/>
+                </a:solidFill>
+                <a:latin typeface="Noto Sans JP"/>
+              </a:rPr>
+              <a:t>休日の登録</a:t>
+            </a:r>
+          </a:p>
+          <a:p>
             <a:r>
               <a:rPr sz="1300">
                 <a:solidFill>
-                  <a:srgbClr val="3D2B1F"/>
-                </a:solidFill>
-                <a:latin typeface="Noto Sans JP"/>
-              </a:rPr>
-              <a:t>・トップページにバナー表示</a:t>
-            </a:r>
-          </a:p>
-          <a:p>
-            <a:pPr lvl="1"/>
+                  <a:srgbClr val="1A2B4A"/>
+                </a:solidFill>
+                <a:latin typeface="Noto Sans JP"/>
+              </a:rPr>
+              <a:t>・カレンダーから休日を選択</a:t>
+            </a:r>
+          </a:p>
+          <a:p>
             <a:r>
               <a:rPr sz="1300">
                 <a:solidFill>
-                  <a:srgbClr val="3D2B1F"/>
-                </a:solidFill>
-                <a:latin typeface="Noto Sans JP"/>
-              </a:rPr>
-              <a:t>・テキストと表示 ON/OFF を設定</a:t>
-            </a:r>
-          </a:p>
-          <a:p>
-            <a:pPr lvl="1"/>
+                  <a:srgbClr val="1A2B4A"/>
+                </a:solidFill>
+                <a:latin typeface="Noto Sans JP"/>
+              </a:rPr>
+              <a:t>・休日名を任意で入力可能</a:t>
+            </a:r>
+          </a:p>
+          <a:p>
+            <a:r>
+              <a:rPr sz="500"/>
+              <a:t/>
+            </a:r>
+          </a:p>
+          <a:p>
+            <a:r>
+              <a:rPr sz="1400" b="1">
+                <a:solidFill>
+                  <a:srgbClr val="1A2B4A"/>
+                </a:solidFill>
+                <a:latin typeface="Noto Sans JP"/>
+              </a:rPr>
+              <a:t>カレンダーへの反映</a:t>
+            </a:r>
+          </a:p>
+          <a:p>
             <a:r>
               <a:rPr sz="1300">
                 <a:solidFill>
-                  <a:srgbClr val="3D2B1F"/>
-                </a:solidFill>
-                <a:latin typeface="Noto Sans JP"/>
-              </a:rPr>
-              <a:t>・休診のお知らせなどに活用</a:t>
+                  <a:srgbClr val="1A2B4A"/>
+                </a:solidFill>
+                <a:latin typeface="Noto Sans JP"/>
+              </a:rPr>
+              <a:t>・登録した日は予約不可に</a:t>
+            </a:r>
+          </a:p>
+          <a:p>
+            <a:r>
+              <a:rPr sz="1300">
+                <a:solidFill>
+                  <a:srgbClr val="1A2B4A"/>
+                </a:solidFill>
+                <a:latin typeface="Noto Sans JP"/>
+              </a:rPr>
+              <a:t>・グレー表示で視覚的に識別</a:t>
             </a:r>
           </a:p>
         </p:txBody>
       </p:sp>
       <p:pic>
         <p:nvPicPr>
-          <p:cNvPr id="10" name="Picture 9" descr="14_settings_announcement.png"/>
+          <p:cNvPr id="10" name="Picture 9" descr="13_settings_holidays.png"/>
           <p:cNvPicPr>
             <a:picLocks noChangeAspect="1"/>
           </p:cNvPicPr>
@@ -7104,7 +7283,7 @@
             <a:avLst/>
           </a:prstGeom>
           <a:solidFill>
-            <a:srgbClr val="735763"/>
+            <a:srgbClr val="1A2B4A"/>
           </a:solidFill>
           <a:ln>
             <a:noFill/>
@@ -7162,7 +7341,7 @@
                 </a:solidFill>
                 <a:latin typeface="Noto Sans JP"/>
               </a:rPr>
-              <a:t>設定 - アカウント</a:t>
+              <a:t>設定 - お知らせ</a:t>
             </a:r>
           </a:p>
         </p:txBody>
@@ -7175,14 +7354,14 @@
         </p:nvSpPr>
         <p:spPr>
           <a:xfrm>
-            <a:off x="9994392" y="91440"/>
-            <a:ext cx="2011680" cy="411480"/>
+            <a:off x="9811512" y="91440"/>
+            <a:ext cx="2194560" cy="411480"/>
           </a:xfrm>
           <a:prstGeom prst="rect">
             <a:avLst/>
           </a:prstGeom>
           <a:solidFill>
-            <a:srgbClr val="735763"/>
+            <a:srgbClr val="1A2B4A"/>
           </a:solidFill>
           <a:ln>
             <a:noFill/>
@@ -7218,8 +7397,8 @@
         </p:nvSpPr>
         <p:spPr>
           <a:xfrm>
-            <a:off x="9994392" y="91440"/>
-            <a:ext cx="2011680" cy="411480"/>
+            <a:off x="9811512" y="91440"/>
+            <a:ext cx="2194560" cy="411480"/>
           </a:xfrm>
           <a:prstGeom prst="rect">
             <a:avLst/>
@@ -7236,7 +7415,7 @@
             <a:r>
               <a:rPr sz="1300" b="1">
                 <a:solidFill>
-                  <a:srgbClr val="FFFFFF"/>
+                  <a:srgbClr val="1A2B4A"/>
                 </a:solidFill>
                 <a:latin typeface="Noto Sans JP"/>
               </a:rPr>
@@ -7260,7 +7439,7 @@
             <a:avLst/>
           </a:prstGeom>
           <a:solidFill>
-            <a:srgbClr val="FCF0DE"/>
+            <a:srgbClr val="F8F5EE"/>
           </a:solidFill>
           <a:ln>
             <a:noFill/>
@@ -7312,13 +7491,13 @@
           <a:p>
             <a:pPr algn="l"/>
             <a:r>
-              <a:rPr sz="1300" b="0">
-                <a:solidFill>
-                  <a:srgbClr val="8B7355"/>
-                </a:solidFill>
-                <a:latin typeface="Noto Sans JP"/>
-              </a:rPr>
-              <a:t>管理者アカウント情報の変更</a:t>
+              <a:rPr sz="1200" b="0">
+                <a:solidFill>
+                  <a:srgbClr val="6B7C9E"/>
+                </a:solidFill>
+                <a:latin typeface="Noto Sans JP"/>
+              </a:rPr>
+              <a:t>患者向けバナーメッセージ</a:t>
             </a:r>
           </a:p>
         </p:txBody>
@@ -7346,56 +7525,103 @@
           <a:lstStyle/>
           <a:p>
             <a:r>
-              <a:rPr sz="1500" b="1">
-                <a:solidFill>
-                  <a:srgbClr val="735763"/>
-                </a:solidFill>
-                <a:latin typeface="Noto Sans JP"/>
-              </a:rPr>
-              <a:t>アカウント設定</a:t>
-            </a:r>
-          </a:p>
-          <a:p>
-            <a:pPr lvl="1"/>
+              <a:rPr sz="1400" b="1">
+                <a:solidFill>
+                  <a:srgbClr val="1A2B4A"/>
+                </a:solidFill>
+                <a:latin typeface="Noto Sans JP"/>
+              </a:rPr>
+              <a:t>お知らせ機能</a:t>
+            </a:r>
+          </a:p>
+          <a:p>
             <a:r>
               <a:rPr sz="1300">
                 <a:solidFill>
-                  <a:srgbClr val="3D2B1F"/>
-                </a:solidFill>
-                <a:latin typeface="Noto Sans JP"/>
-              </a:rPr>
-              <a:t>・管理者メールアドレスの変更</a:t>
-            </a:r>
-          </a:p>
-          <a:p>
-            <a:pPr lvl="1"/>
+                  <a:srgbClr val="1A2B4A"/>
+                </a:solidFill>
+                <a:latin typeface="Noto Sans JP"/>
+              </a:rPr>
+              <a:t>・トップページにバナー表示</a:t>
+            </a:r>
+          </a:p>
+          <a:p>
             <a:r>
               <a:rPr sz="1300">
                 <a:solidFill>
-                  <a:srgbClr val="3D2B1F"/>
-                </a:solidFill>
-                <a:latin typeface="Noto Sans JP"/>
-              </a:rPr>
-              <a:t>・パスワードの変更</a:t>
-            </a:r>
-          </a:p>
-          <a:p>
-            <a:pPr lvl="1"/>
+                  <a:srgbClr val="1A2B4A"/>
+                </a:solidFill>
+                <a:latin typeface="Noto Sans JP"/>
+              </a:rPr>
+              <a:t>・テキスト内容の編集</a:t>
+            </a:r>
+          </a:p>
+          <a:p>
             <a:r>
               <a:rPr sz="1300">
                 <a:solidFill>
-                  <a:srgbClr val="3D2B1F"/>
-                </a:solidFill>
-                <a:latin typeface="Noto Sans JP"/>
-              </a:rPr>
-              <a:t>・変更後は再ログインが必要</a:t>
+                  <a:srgbClr val="1A2B4A"/>
+                </a:solidFill>
+                <a:latin typeface="Noto Sans JP"/>
+              </a:rPr>
+              <a:t>・ON/OFF 切り替え</a:t>
+            </a:r>
+          </a:p>
+          <a:p>
+            <a:r>
+              <a:rPr sz="500"/>
+              <a:t/>
+            </a:r>
+          </a:p>
+          <a:p>
+            <a:r>
+              <a:rPr sz="1400" b="1">
+                <a:solidFill>
+                  <a:srgbClr val="1A2B4A"/>
+                </a:solidFill>
+                <a:latin typeface="Noto Sans JP"/>
+              </a:rPr>
+              <a:t>活用例</a:t>
+            </a:r>
+          </a:p>
+          <a:p>
+            <a:r>
+              <a:rPr sz="1300">
+                <a:solidFill>
+                  <a:srgbClr val="1A2B4A"/>
+                </a:solidFill>
+                <a:latin typeface="Noto Sans JP"/>
+              </a:rPr>
+              <a:t>・臨時休診のお知らせ</a:t>
+            </a:r>
+          </a:p>
+          <a:p>
+            <a:r>
+              <a:rPr sz="1300">
+                <a:solidFill>
+                  <a:srgbClr val="1A2B4A"/>
+                </a:solidFill>
+                <a:latin typeface="Noto Sans JP"/>
+              </a:rPr>
+              <a:t>・年末年始の受付時間変更</a:t>
+            </a:r>
+          </a:p>
+          <a:p>
+            <a:r>
+              <a:rPr sz="1300">
+                <a:solidFill>
+                  <a:srgbClr val="1A2B4A"/>
+                </a:solidFill>
+                <a:latin typeface="Noto Sans JP"/>
+              </a:rPr>
+              <a:t>・院内イベントの告知</a:t>
             </a:r>
           </a:p>
         </p:txBody>
       </p:sp>
       <p:pic>
         <p:nvPicPr>
-          <p:cNvPr id="10" name="Picture 9" descr="15_settings_account.png"/>
+          <p:cNvPr id="10" name="Picture 9" descr="14_settings_announcement.png"/>
           <p:cNvPicPr>
             <a:picLocks noChangeAspect="1"/>
           </p:cNvPicPr>
@@ -7493,7 +7719,7 @@
             <a:avLst/>
           </a:prstGeom>
           <a:solidFill>
-            <a:srgbClr val="735763"/>
+            <a:srgbClr val="1A2B4A"/>
           </a:solidFill>
           <a:ln>
             <a:noFill/>
@@ -7564,14 +7790,14 @@
         </p:nvSpPr>
         <p:spPr>
           <a:xfrm>
-            <a:off x="9994392" y="91440"/>
-            <a:ext cx="2011680" cy="411480"/>
+            <a:off x="9811512" y="91440"/>
+            <a:ext cx="2194560" cy="411480"/>
           </a:xfrm>
           <a:prstGeom prst="rect">
             <a:avLst/>
           </a:prstGeom>
           <a:solidFill>
-            <a:srgbClr val="8B7355"/>
+            <a:srgbClr val="6B7C9E"/>
           </a:solidFill>
           <a:ln>
             <a:noFill/>
@@ -7607,8 +7833,8 @@
         </p:nvSpPr>
         <p:spPr>
           <a:xfrm>
-            <a:off x="9994392" y="91440"/>
-            <a:ext cx="2011680" cy="411480"/>
+            <a:off x="9811512" y="91440"/>
+            <a:ext cx="2194560" cy="411480"/>
           </a:xfrm>
           <a:prstGeom prst="rect">
             <a:avLst/>
@@ -7625,7 +7851,7 @@
             <a:r>
               <a:rPr sz="1300" b="1">
                 <a:solidFill>
-                  <a:srgbClr val="FFFFFF"/>
+                  <a:srgbClr val="1A2B4A"/>
                 </a:solidFill>
                 <a:latin typeface="Noto Sans JP"/>
               </a:rPr>
@@ -7658,9 +7884,9 @@
           <a:p>
             <a:pPr algn="l"/>
             <a:r>
-              <a:rPr sz="1800" b="1">
-                <a:solidFill>
-                  <a:srgbClr val="735763"/>
+              <a:rPr sz="1700" b="1">
+                <a:solidFill>
+                  <a:srgbClr val="1A2B4A"/>
                 </a:solidFill>
                 <a:latin typeface="Noto Sans JP"/>
               </a:rPr>
@@ -7684,7 +7910,7 @@
             <a:avLst/>
           </a:prstGeom>
           <a:solidFill>
-            <a:srgbClr val="F79321"/>
+            <a:srgbClr val="D4AF37"/>
           </a:solidFill>
           <a:ln>
             <a:noFill/>
@@ -7736,13 +7962,13 @@
           <a:p>
             <a:pPr algn="l"/>
             <a:r>
-              <a:rPr sz="1400" b="0">
-                <a:solidFill>
-                  <a:srgbClr val="3D2B1F"/>
-                </a:solidFill>
-                <a:latin typeface="Noto Sans JP"/>
-              </a:rPr>
-              <a:t>01  トップページ（カレンダー）</a:t>
+              <a:rPr sz="1300" b="0">
+                <a:solidFill>
+                  <a:srgbClr val="1A2B4A"/>
+                </a:solidFill>
+                <a:latin typeface="Noto Sans JP"/>
+              </a:rPr>
+              <a:t>01  トップページ（カレンダー日時選択）</a:t>
             </a:r>
           </a:p>
         </p:txBody>
@@ -7755,7 +7981,7 @@
         </p:nvSpPr>
         <p:spPr>
           <a:xfrm>
-            <a:off x="457200" y="1984248"/>
+            <a:off x="457200" y="1975104"/>
             <a:ext cx="5212080" cy="411480"/>
           </a:xfrm>
           <a:prstGeom prst="rect">
@@ -7771,9 +7997,9 @@
           <a:p>
             <a:pPr algn="l"/>
             <a:r>
-              <a:rPr sz="1400" b="0">
-                <a:solidFill>
-                  <a:srgbClr val="3D2B1F"/>
+              <a:rPr sz="1300" b="0">
+                <a:solidFill>
+                  <a:srgbClr val="1A2B4A"/>
                 </a:solidFill>
                 <a:latin typeface="Noto Sans JP"/>
               </a:rPr>
@@ -7790,7 +8016,7 @@
         </p:nvSpPr>
         <p:spPr>
           <a:xfrm>
-            <a:off x="457200" y="2414016"/>
+            <a:off x="457200" y="2395728"/>
             <a:ext cx="5212080" cy="411480"/>
           </a:xfrm>
           <a:prstGeom prst="rect">
@@ -7806,9 +8032,9 @@
           <a:p>
             <a:pPr algn="l"/>
             <a:r>
-              <a:rPr sz="1400" b="0">
-                <a:solidFill>
-                  <a:srgbClr val="3D2B1F"/>
+              <a:rPr sz="1300" b="0">
+                <a:solidFill>
+                  <a:srgbClr val="1A2B4A"/>
                 </a:solidFill>
                 <a:latin typeface="Noto Sans JP"/>
               </a:rPr>
@@ -7825,7 +8051,7 @@
         </p:nvSpPr>
         <p:spPr>
           <a:xfrm>
-            <a:off x="457200" y="2843784"/>
+            <a:off x="457200" y="2816352"/>
             <a:ext cx="5212080" cy="411480"/>
           </a:xfrm>
           <a:prstGeom prst="rect">
@@ -7841,9 +8067,9 @@
           <a:p>
             <a:pPr algn="l"/>
             <a:r>
-              <a:rPr sz="1400" b="0">
-                <a:solidFill>
-                  <a:srgbClr val="3D2B1F"/>
+              <a:rPr sz="1300" b="0">
+                <a:solidFill>
+                  <a:srgbClr val="1A2B4A"/>
                 </a:solidFill>
                 <a:latin typeface="Noto Sans JP"/>
               </a:rPr>
@@ -7860,7 +8086,7 @@
         </p:nvSpPr>
         <p:spPr>
           <a:xfrm>
-            <a:off x="457200" y="3273552"/>
+            <a:off x="457200" y="3236976"/>
             <a:ext cx="5212080" cy="411480"/>
           </a:xfrm>
           <a:prstGeom prst="rect">
@@ -7876,13 +8102,13 @@
           <a:p>
             <a:pPr algn="l"/>
             <a:r>
-              <a:rPr sz="1400" b="0">
-                <a:solidFill>
-                  <a:srgbClr val="3D2B1F"/>
-                </a:solidFill>
-                <a:latin typeface="Noto Sans JP"/>
-              </a:rPr>
-              <a:t>05  予約キャンセル</a:t>
+              <a:rPr sz="1300" b="0">
+                <a:solidFill>
+                  <a:srgbClr val="1A2B4A"/>
+                </a:solidFill>
+                <a:latin typeface="Noto Sans JP"/>
+              </a:rPr>
+              <a:t>05  予約完了</a:t>
             </a:r>
           </a:p>
         </p:txBody>
@@ -7895,7 +8121,7 @@
         </p:nvSpPr>
         <p:spPr>
           <a:xfrm>
-            <a:off x="457200" y="3703320"/>
+            <a:off x="457200" y="3657600"/>
             <a:ext cx="5212080" cy="411480"/>
           </a:xfrm>
           <a:prstGeom prst="rect">
@@ -7911,13 +8137,13 @@
           <a:p>
             <a:pPr algn="l"/>
             <a:r>
-              <a:rPr sz="1400" b="0">
-                <a:solidFill>
-                  <a:srgbClr val="3D2B1F"/>
-                </a:solidFill>
-                <a:latin typeface="Noto Sans JP"/>
-              </a:rPr>
-              <a:t>06  プライバシーポリシー</a:t>
+              <a:rPr sz="1300" b="0">
+                <a:solidFill>
+                  <a:srgbClr val="1A2B4A"/>
+                </a:solidFill>
+                <a:latin typeface="Noto Sans JP"/>
+              </a:rPr>
+              <a:t>06  予約キャンセル（/cancel）</a:t>
             </a:r>
           </a:p>
         </p:txBody>
@@ -7930,7 +8156,7 @@
         </p:nvSpPr>
         <p:spPr>
           <a:xfrm>
-            <a:off x="457200" y="4133088"/>
+            <a:off x="457200" y="4078224"/>
             <a:ext cx="5212080" cy="411480"/>
           </a:xfrm>
           <a:prstGeom prst="rect">
@@ -7946,13 +8172,13 @@
           <a:p>
             <a:pPr algn="l"/>
             <a:r>
-              <a:rPr sz="1400" b="0">
-                <a:solidFill>
-                  <a:srgbClr val="3D2B1F"/>
-                </a:solidFill>
-                <a:latin typeface="Noto Sans JP"/>
-              </a:rPr>
-              <a:t>07  モバイル対応</a:t>
+              <a:rPr sz="1300" b="0">
+                <a:solidFill>
+                  <a:srgbClr val="1A2B4A"/>
+                </a:solidFill>
+                <a:latin typeface="Noto Sans JP"/>
+              </a:rPr>
+              <a:t>07  プライバシーポリシー</a:t>
             </a:r>
           </a:p>
         </p:txBody>
@@ -7965,8 +8191,8 @@
         </p:nvSpPr>
         <p:spPr>
           <a:xfrm>
-            <a:off x="6217920" y="868680"/>
-            <a:ext cx="5303520" cy="502920"/>
+            <a:off x="457200" y="4498848"/>
+            <a:ext cx="5212080" cy="411480"/>
           </a:xfrm>
           <a:prstGeom prst="rect">
             <a:avLst/>
@@ -7981,9 +8207,44 @@
           <a:p>
             <a:pPr algn="l"/>
             <a:r>
-              <a:rPr sz="1800" b="1">
-                <a:solidFill>
-                  <a:srgbClr val="735763"/>
+              <a:rPr sz="1300" b="0">
+                <a:solidFill>
+                  <a:srgbClr val="1A2B4A"/>
+                </a:solidFill>
+                <a:latin typeface="Noto Sans JP"/>
+              </a:rPr>
+              <a:t>08  モバイル対応</a:t>
+            </a:r>
+          </a:p>
+        </p:txBody>
+      </p:sp>
+      <p:sp>
+        <p:nvSpPr>
+          <p:cNvPr id="17" name="TextBox 16"/>
+          <p:cNvSpPr txBox="1"/>
+          <p:nvPr/>
+        </p:nvSpPr>
+        <p:spPr>
+          <a:xfrm>
+            <a:off x="6400800" y="868680"/>
+            <a:ext cx="5303520" cy="502920"/>
+          </a:xfrm>
+          <a:prstGeom prst="rect">
+            <a:avLst/>
+          </a:prstGeom>
+          <a:noFill/>
+        </p:spPr>
+        <p:txBody>
+          <a:bodyPr wrap="square">
+            <a:spAutoFit/>
+          </a:bodyPr>
+          <a:lstStyle/>
+          <a:p>
+            <a:pPr algn="l"/>
+            <a:r>
+              <a:rPr sz="1700" b="1">
+                <a:solidFill>
+                  <a:srgbClr val="1A2B4A"/>
                 </a:solidFill>
                 <a:latin typeface="Noto Sans JP"/>
               </a:rPr>
@@ -7994,20 +8255,20 @@
       </p:sp>
       <p:sp>
         <p:nvSpPr>
-          <p:cNvPr id="17" name="Rectangle 16"/>
+          <p:cNvPr id="18" name="Rectangle 17"/>
           <p:cNvSpPr/>
           <p:nvPr/>
         </p:nvSpPr>
         <p:spPr>
           <a:xfrm>
-            <a:off x="6217920" y="1344168"/>
+            <a:off x="6400800" y="1344168"/>
             <a:ext cx="2286000" cy="36576"/>
           </a:xfrm>
           <a:prstGeom prst="rect">
             <a:avLst/>
           </a:prstGeom>
           <a:solidFill>
-            <a:srgbClr val="F79321"/>
+            <a:srgbClr val="D4AF37"/>
           </a:solidFill>
           <a:ln>
             <a:noFill/>
@@ -8037,13 +8298,13 @@
       </p:sp>
       <p:sp>
         <p:nvSpPr>
-          <p:cNvPr id="18" name="TextBox 17"/>
+          <p:cNvPr id="19" name="TextBox 18"/>
           <p:cNvSpPr txBox="1"/>
           <p:nvPr/>
         </p:nvSpPr>
         <p:spPr>
           <a:xfrm>
-            <a:off x="6309360" y="1554480"/>
+            <a:off x="6492240" y="1554480"/>
             <a:ext cx="5212080" cy="393192"/>
           </a:xfrm>
           <a:prstGeom prst="rect">
@@ -8059,26 +8320,26 @@
           <a:p>
             <a:pPr algn="l"/>
             <a:r>
-              <a:rPr sz="1400" b="0">
-                <a:solidFill>
-                  <a:srgbClr val="3D2B1F"/>
-                </a:solidFill>
-                <a:latin typeface="Noto Sans JP"/>
-              </a:rPr>
-              <a:t>08  管理者ログイン</a:t>
-            </a:r>
-          </a:p>
-        </p:txBody>
-      </p:sp>
-      <p:sp>
-        <p:nvSpPr>
-          <p:cNvPr id="19" name="TextBox 18"/>
+              <a:rPr sz="1300" b="0">
+                <a:solidFill>
+                  <a:srgbClr val="1A2B4A"/>
+                </a:solidFill>
+                <a:latin typeface="Noto Sans JP"/>
+              </a:rPr>
+              <a:t>09  管理者ログイン（/login）</a:t>
+            </a:r>
+          </a:p>
+        </p:txBody>
+      </p:sp>
+      <p:sp>
+        <p:nvSpPr>
+          <p:cNvPr id="20" name="TextBox 19"/>
           <p:cNvSpPr txBox="1"/>
           <p:nvPr/>
         </p:nvSpPr>
         <p:spPr>
           <a:xfrm>
-            <a:off x="6309360" y="1956816"/>
+            <a:off x="6492240" y="1956816"/>
             <a:ext cx="5212080" cy="393192"/>
           </a:xfrm>
           <a:prstGeom prst="rect">
@@ -8094,26 +8355,26 @@
           <a:p>
             <a:pPr algn="l"/>
             <a:r>
-              <a:rPr sz="1400" b="0">
-                <a:solidFill>
-                  <a:srgbClr val="3D2B1F"/>
-                </a:solidFill>
-                <a:latin typeface="Noto Sans JP"/>
-              </a:rPr>
-              <a:t>09  予約ダッシュボード</a:t>
-            </a:r>
-          </a:p>
-        </p:txBody>
-      </p:sp>
-      <p:sp>
-        <p:nvSpPr>
-          <p:cNvPr id="20" name="TextBox 19"/>
+              <a:rPr sz="1300" b="0">
+                <a:solidFill>
+                  <a:srgbClr val="1A2B4A"/>
+                </a:solidFill>
+                <a:latin typeface="Noto Sans JP"/>
+              </a:rPr>
+              <a:t>10  予約ダッシュボード（/admin）</a:t>
+            </a:r>
+          </a:p>
+        </p:txBody>
+      </p:sp>
+      <p:sp>
+        <p:nvSpPr>
+          <p:cNvPr id="21" name="TextBox 20"/>
           <p:cNvSpPr txBox="1"/>
           <p:nvPr/>
         </p:nvSpPr>
         <p:spPr>
           <a:xfrm>
-            <a:off x="6309360" y="2359152"/>
+            <a:off x="6492240" y="2359152"/>
             <a:ext cx="5212080" cy="393192"/>
           </a:xfrm>
           <a:prstGeom prst="rect">
@@ -8129,26 +8390,26 @@
           <a:p>
             <a:pPr algn="l"/>
             <a:r>
-              <a:rPr sz="1400" b="0">
-                <a:solidFill>
-                  <a:srgbClr val="3D2B1F"/>
-                </a:solidFill>
-                <a:latin typeface="Noto Sans JP"/>
-              </a:rPr>
-              <a:t>10  予約詳細モーダル</a:t>
-            </a:r>
-          </a:p>
-        </p:txBody>
-      </p:sp>
-      <p:sp>
-        <p:nvSpPr>
-          <p:cNvPr id="21" name="TextBox 20"/>
+              <a:rPr sz="1300" b="0">
+                <a:solidFill>
+                  <a:srgbClr val="1A2B4A"/>
+                </a:solidFill>
+                <a:latin typeface="Noto Sans JP"/>
+              </a:rPr>
+              <a:t>11  予約詳細モーダル</a:t>
+            </a:r>
+          </a:p>
+        </p:txBody>
+      </p:sp>
+      <p:sp>
+        <p:nvSpPr>
+          <p:cNvPr id="22" name="TextBox 21"/>
           <p:cNvSpPr txBox="1"/>
           <p:nvPr/>
         </p:nvSpPr>
         <p:spPr>
           <a:xfrm>
-            <a:off x="6309360" y="2761488"/>
+            <a:off x="6492240" y="2761488"/>
             <a:ext cx="5212080" cy="393192"/>
           </a:xfrm>
           <a:prstGeom prst="rect">
@@ -8164,26 +8425,26 @@
           <a:p>
             <a:pPr algn="l"/>
             <a:r>
-              <a:rPr sz="1400" b="0">
-                <a:solidFill>
-                  <a:srgbClr val="3D2B1F"/>
-                </a:solidFill>
-                <a:latin typeface="Noto Sans JP"/>
-              </a:rPr>
-              <a:t>11  設定 - 院内情報</a:t>
-            </a:r>
-          </a:p>
-        </p:txBody>
-      </p:sp>
-      <p:sp>
-        <p:nvSpPr>
-          <p:cNvPr id="22" name="TextBox 21"/>
+              <a:rPr sz="1300" b="0">
+                <a:solidFill>
+                  <a:srgbClr val="1A2B4A"/>
+                </a:solidFill>
+                <a:latin typeface="Noto Sans JP"/>
+              </a:rPr>
+              <a:t>12  設定 - 基本情報</a:t>
+            </a:r>
+          </a:p>
+        </p:txBody>
+      </p:sp>
+      <p:sp>
+        <p:nvSpPr>
+          <p:cNvPr id="23" name="TextBox 22"/>
           <p:cNvSpPr txBox="1"/>
           <p:nvPr/>
         </p:nvSpPr>
         <p:spPr>
           <a:xfrm>
-            <a:off x="6309360" y="3163824"/>
+            <a:off x="6492240" y="3163824"/>
             <a:ext cx="5212080" cy="393192"/>
           </a:xfrm>
           <a:prstGeom prst="rect">
@@ -8199,26 +8460,26 @@
           <a:p>
             <a:pPr algn="l"/>
             <a:r>
-              <a:rPr sz="1400" b="0">
-                <a:solidFill>
-                  <a:srgbClr val="3D2B1F"/>
-                </a:solidFill>
-                <a:latin typeface="Noto Sans JP"/>
-              </a:rPr>
-              <a:t>12  設定 - 営業時間</a:t>
-            </a:r>
-          </a:p>
-        </p:txBody>
-      </p:sp>
-      <p:sp>
-        <p:nvSpPr>
-          <p:cNvPr id="23" name="TextBox 22"/>
+              <a:rPr sz="1300" b="0">
+                <a:solidFill>
+                  <a:srgbClr val="1A2B4A"/>
+                </a:solidFill>
+                <a:latin typeface="Noto Sans JP"/>
+              </a:rPr>
+              <a:t>13  設定 - 営業時間</a:t>
+            </a:r>
+          </a:p>
+        </p:txBody>
+      </p:sp>
+      <p:sp>
+        <p:nvSpPr>
+          <p:cNvPr id="24" name="TextBox 23"/>
           <p:cNvSpPr txBox="1"/>
           <p:nvPr/>
         </p:nvSpPr>
         <p:spPr>
           <a:xfrm>
-            <a:off x="6309360" y="3566160"/>
+            <a:off x="6492240" y="3566160"/>
             <a:ext cx="5212080" cy="393192"/>
           </a:xfrm>
           <a:prstGeom prst="rect">
@@ -8234,26 +8495,26 @@
           <a:p>
             <a:pPr algn="l"/>
             <a:r>
-              <a:rPr sz="1400" b="0">
-                <a:solidFill>
-                  <a:srgbClr val="3D2B1F"/>
-                </a:solidFill>
-                <a:latin typeface="Noto Sans JP"/>
-              </a:rPr>
-              <a:t>13  設定 - 休日設定</a:t>
-            </a:r>
-          </a:p>
-        </p:txBody>
-      </p:sp>
-      <p:sp>
-        <p:nvSpPr>
-          <p:cNvPr id="24" name="TextBox 23"/>
+              <a:rPr sz="1300" b="0">
+                <a:solidFill>
+                  <a:srgbClr val="1A2B4A"/>
+                </a:solidFill>
+                <a:latin typeface="Noto Sans JP"/>
+              </a:rPr>
+              <a:t>14  設定 - 休日設定</a:t>
+            </a:r>
+          </a:p>
+        </p:txBody>
+      </p:sp>
+      <p:sp>
+        <p:nvSpPr>
+          <p:cNvPr id="25" name="TextBox 24"/>
           <p:cNvSpPr txBox="1"/>
           <p:nvPr/>
         </p:nvSpPr>
         <p:spPr>
           <a:xfrm>
-            <a:off x="6309360" y="3968496"/>
+            <a:off x="6492240" y="3968496"/>
             <a:ext cx="5212080" cy="393192"/>
           </a:xfrm>
           <a:prstGeom prst="rect">
@@ -8269,26 +8530,26 @@
           <a:p>
             <a:pPr algn="l"/>
             <a:r>
-              <a:rPr sz="1400" b="0">
-                <a:solidFill>
-                  <a:srgbClr val="3D2B1F"/>
-                </a:solidFill>
-                <a:latin typeface="Noto Sans JP"/>
-              </a:rPr>
-              <a:t>14  設定 - お知らせ</a:t>
-            </a:r>
-          </a:p>
-        </p:txBody>
-      </p:sp>
-      <p:sp>
-        <p:nvSpPr>
-          <p:cNvPr id="25" name="TextBox 24"/>
+              <a:rPr sz="1300" b="0">
+                <a:solidFill>
+                  <a:srgbClr val="1A2B4A"/>
+                </a:solidFill>
+                <a:latin typeface="Noto Sans JP"/>
+              </a:rPr>
+              <a:t>15  設定 - お知らせ</a:t>
+            </a:r>
+          </a:p>
+        </p:txBody>
+      </p:sp>
+      <p:sp>
+        <p:nvSpPr>
+          <p:cNvPr id="26" name="TextBox 25"/>
           <p:cNvSpPr txBox="1"/>
           <p:nvPr/>
         </p:nvSpPr>
         <p:spPr>
           <a:xfrm>
-            <a:off x="6309360" y="4370832"/>
+            <a:off x="6492240" y="4370832"/>
             <a:ext cx="5212080" cy="393192"/>
           </a:xfrm>
           <a:prstGeom prst="rect">
@@ -8304,26 +8565,26 @@
           <a:p>
             <a:pPr algn="l"/>
             <a:r>
-              <a:rPr sz="1400" b="0">
-                <a:solidFill>
-                  <a:srgbClr val="3D2B1F"/>
-                </a:solidFill>
-                <a:latin typeface="Noto Sans JP"/>
-              </a:rPr>
-              <a:t>15  設定 - アカウント</a:t>
-            </a:r>
-          </a:p>
-        </p:txBody>
-      </p:sp>
-      <p:sp>
-        <p:nvSpPr>
-          <p:cNvPr id="26" name="TextBox 25"/>
+              <a:rPr sz="1300" b="0">
+                <a:solidFill>
+                  <a:srgbClr val="1A2B4A"/>
+                </a:solidFill>
+                <a:latin typeface="Noto Sans JP"/>
+              </a:rPr>
+              <a:t>16  設定 - アカウント・ユーザー管理</a:t>
+            </a:r>
+          </a:p>
+        </p:txBody>
+      </p:sp>
+      <p:sp>
+        <p:nvSpPr>
+          <p:cNvPr id="27" name="TextBox 26"/>
           <p:cNvSpPr txBox="1"/>
           <p:nvPr/>
         </p:nvSpPr>
         <p:spPr>
           <a:xfrm>
-            <a:off x="6309360" y="4773168"/>
+            <a:off x="6492240" y="4773168"/>
             <a:ext cx="5212080" cy="393192"/>
           </a:xfrm>
           <a:prstGeom prst="rect">
@@ -8339,26 +8600,26 @@
           <a:p>
             <a:pPr algn="l"/>
             <a:r>
-              <a:rPr sz="1400" b="0">
-                <a:solidFill>
-                  <a:srgbClr val="3D2B1F"/>
-                </a:solidFill>
-                <a:latin typeface="Noto Sans JP"/>
-              </a:rPr>
-              <a:t>16  ユーザー管理</a:t>
-            </a:r>
-          </a:p>
-        </p:txBody>
-      </p:sp>
-      <p:sp>
-        <p:nvSpPr>
-          <p:cNvPr id="27" name="TextBox 26"/>
+              <a:rPr sz="1300" b="0">
+                <a:solidFill>
+                  <a:srgbClr val="1A2B4A"/>
+                </a:solidFill>
+                <a:latin typeface="Noto Sans JP"/>
+              </a:rPr>
+              <a:t>17  パスワード変更（/admin/change-password）</a:t>
+            </a:r>
+          </a:p>
+        </p:txBody>
+      </p:sp>
+      <p:sp>
+        <p:nvSpPr>
+          <p:cNvPr id="28" name="TextBox 27"/>
           <p:cNvSpPr txBox="1"/>
           <p:nvPr/>
         </p:nvSpPr>
         <p:spPr>
           <a:xfrm>
-            <a:off x="6309360" y="5175504"/>
+            <a:off x="6492240" y="5175504"/>
             <a:ext cx="5212080" cy="393192"/>
           </a:xfrm>
           <a:prstGeom prst="rect">
@@ -8374,13 +8635,13 @@
           <a:p>
             <a:pPr algn="l"/>
             <a:r>
-              <a:rPr sz="1400" b="0">
-                <a:solidFill>
-                  <a:srgbClr val="3D2B1F"/>
-                </a:solidFill>
-                <a:latin typeface="Noto Sans JP"/>
-              </a:rPr>
-              <a:t>17  通知メール設定</a:t>
+              <a:rPr sz="1300" b="0">
+                <a:solidFill>
+                  <a:srgbClr val="1A2B4A"/>
+                </a:solidFill>
+                <a:latin typeface="Noto Sans JP"/>
+              </a:rPr>
+              <a:t>18  リマインダーメール設定</a:t>
             </a:r>
           </a:p>
         </p:txBody>
@@ -8461,7 +8722,7 @@
             <a:avLst/>
           </a:prstGeom>
           <a:solidFill>
-            <a:srgbClr val="735763"/>
+            <a:srgbClr val="1A2B4A"/>
           </a:solidFill>
           <a:ln>
             <a:noFill/>
@@ -8519,7 +8780,7 @@
                 </a:solidFill>
                 <a:latin typeface="Noto Sans JP"/>
               </a:rPr>
-              <a:t>ユーザー管理</a:t>
+              <a:t>設定 - アカウント・ユーザー管理</a:t>
             </a:r>
           </a:p>
         </p:txBody>
@@ -8532,14 +8793,14 @@
         </p:nvSpPr>
         <p:spPr>
           <a:xfrm>
-            <a:off x="9994392" y="91440"/>
-            <a:ext cx="2011680" cy="411480"/>
+            <a:off x="9811512" y="91440"/>
+            <a:ext cx="2194560" cy="411480"/>
           </a:xfrm>
           <a:prstGeom prst="rect">
             <a:avLst/>
           </a:prstGeom>
           <a:solidFill>
-            <a:srgbClr val="735763"/>
+            <a:srgbClr val="1A2B4A"/>
           </a:solidFill>
           <a:ln>
             <a:noFill/>
@@ -8575,8 +8836,8 @@
         </p:nvSpPr>
         <p:spPr>
           <a:xfrm>
-            <a:off x="9994392" y="91440"/>
-            <a:ext cx="2011680" cy="411480"/>
+            <a:off x="9811512" y="91440"/>
+            <a:ext cx="2194560" cy="411480"/>
           </a:xfrm>
           <a:prstGeom prst="rect">
             <a:avLst/>
@@ -8593,7 +8854,7 @@
             <a:r>
               <a:rPr sz="1300" b="1">
                 <a:solidFill>
-                  <a:srgbClr val="FFFFFF"/>
+                  <a:srgbClr val="1A2B4A"/>
                 </a:solidFill>
                 <a:latin typeface="Noto Sans JP"/>
               </a:rPr>
@@ -8617,7 +8878,7 @@
             <a:avLst/>
           </a:prstGeom>
           <a:solidFill>
-            <a:srgbClr val="FCF0DE"/>
+            <a:srgbClr val="F8F5EE"/>
           </a:solidFill>
           <a:ln>
             <a:noFill/>
@@ -8669,13 +8930,13 @@
           <a:p>
             <a:pPr algn="l"/>
             <a:r>
-              <a:rPr sz="1300" b="0">
-                <a:solidFill>
-                  <a:srgbClr val="8B7355"/>
-                </a:solidFill>
-                <a:latin typeface="Noto Sans JP"/>
-              </a:rPr>
-              <a:t>管理者アカウントの追加・削除</a:t>
+              <a:rPr sz="1200" b="0">
+                <a:solidFill>
+                  <a:srgbClr val="6B7C9E"/>
+                </a:solidFill>
+                <a:latin typeface="Noto Sans JP"/>
+              </a:rPr>
+              <a:t>管理者アカウントの管理</a:t>
             </a:r>
           </a:p>
         </p:txBody>
@@ -8703,85 +8964,120 @@
           <a:lstStyle/>
           <a:p>
             <a:r>
-              <a:rPr sz="1500" b="1">
-                <a:solidFill>
-                  <a:srgbClr val="735763"/>
-                </a:solidFill>
-                <a:latin typeface="Noto Sans JP"/>
-              </a:rPr>
-              <a:t>ユーザー管理機能</a:t>
-            </a:r>
-          </a:p>
-          <a:p>
-            <a:pPr lvl="1"/>
+              <a:rPr sz="1400" b="1">
+                <a:solidFill>
+                  <a:srgbClr val="1A2B4A"/>
+                </a:solidFill>
+                <a:latin typeface="Noto Sans JP"/>
+              </a:rPr>
+              <a:t>ユーザー管理</a:t>
+            </a:r>
+          </a:p>
+          <a:p>
             <a:r>
               <a:rPr sz="1300">
                 <a:solidFill>
-                  <a:srgbClr val="3D2B1F"/>
-                </a:solidFill>
-                <a:latin typeface="Noto Sans JP"/>
-              </a:rPr>
-              <a:t>・管理者アカウントの追加・削除</a:t>
-            </a:r>
-          </a:p>
-          <a:p>
-            <a:pPr lvl="1"/>
+                  <a:srgbClr val="1A2B4A"/>
+                </a:solidFill>
+                <a:latin typeface="Noto Sans JP"/>
+              </a:rPr>
+              <a:t>・管理者アカウントの一覧表示</a:t>
+            </a:r>
+          </a:p>
+          <a:p>
             <a:r>
               <a:rPr sz="1300">
                 <a:solidFill>
-                  <a:srgbClr val="3D2B1F"/>
-                </a:solidFill>
-                <a:latin typeface="Noto Sans JP"/>
-              </a:rPr>
-              <a:t>・メールアドレスで新規招待</a:t>
-            </a:r>
-          </a:p>
-          <a:p>
-            <a:r>
-              <a:rPr sz="600"/>
+                  <a:srgbClr val="1A2B4A"/>
+                </a:solidFill>
+                <a:latin typeface="Noto Sans JP"/>
+              </a:rPr>
+              <a:t>・メールアドレスはマスク表示</a:t>
+            </a:r>
+          </a:p>
+          <a:p>
+            <a:r>
+              <a:rPr sz="1300">
+                <a:solidFill>
+                  <a:srgbClr val="1A2B4A"/>
+                </a:solidFill>
+                <a:latin typeface="Noto Sans JP"/>
+              </a:rPr>
+              <a:t>・新規管理者の追加</a:t>
+            </a:r>
+          </a:p>
+          <a:p>
+            <a:r>
+              <a:rPr sz="1300">
+                <a:solidFill>
+                  <a:srgbClr val="1A2B4A"/>
+                </a:solidFill>
+                <a:latin typeface="Noto Sans JP"/>
+              </a:rPr>
+              <a:t>・不要アカウントの削除</a:t>
+            </a:r>
+          </a:p>
+          <a:p>
+            <a:r>
+              <a:rPr sz="500"/>
               <a:t/>
             </a:r>
           </a:p>
           <a:p>
             <a:r>
-              <a:rPr sz="1500" b="1">
-                <a:solidFill>
-                  <a:srgbClr val="735763"/>
-                </a:solidFill>
-                <a:latin typeface="Noto Sans JP"/>
-              </a:rPr>
-              <a:t>権限</a:t>
-            </a:r>
-          </a:p>
-          <a:p>
-            <a:pPr lvl="1"/>
+              <a:rPr sz="1400" b="1">
+                <a:solidFill>
+                  <a:srgbClr val="1A2B4A"/>
+                </a:solidFill>
+                <a:latin typeface="Noto Sans JP"/>
+              </a:rPr>
+              <a:t>アカウント設定</a:t>
+            </a:r>
+          </a:p>
+          <a:p>
             <a:r>
               <a:rPr sz="1300">
                 <a:solidFill>
-                  <a:srgbClr val="3D2B1F"/>
-                </a:solidFill>
-                <a:latin typeface="Noto Sans JP"/>
-              </a:rPr>
-              <a:t>・管理者権限は admin クレームで制御</a:t>
-            </a:r>
-          </a:p>
-          <a:p>
-            <a:pPr lvl="1"/>
+                  <a:srgbClr val="1A2B4A"/>
+                </a:solidFill>
+                <a:latin typeface="Noto Sans JP"/>
+              </a:rPr>
+              <a:t>・パスワード変更ページへのリンク</a:t>
+            </a:r>
+          </a:p>
+          <a:p>
+            <a:r>
+              <a:rPr sz="500"/>
+              <a:t/>
+            </a:r>
+          </a:p>
+          <a:p>
+            <a:r>
+              <a:rPr sz="1200">
+                <a:solidFill>
+                  <a:srgbClr val="B45A00"/>
+                </a:solidFill>
+                <a:latin typeface="Noto Sans JP"/>
+              </a:rPr>
+              <a:t>⚠ 管理者追加後は初回ログイン時に</a:t>
+            </a:r>
+          </a:p>
+          <a:p>
             <a:r>
               <a:rPr sz="1300">
                 <a:solidFill>
-                  <a:srgbClr val="3D2B1F"/>
-                </a:solidFill>
-                <a:latin typeface="Noto Sans JP"/>
-              </a:rPr>
-              <a:t>・一般ユーザーは管理画面にアクセス不可</a:t>
+                  <a:srgbClr val="1A2B4A"/>
+                </a:solidFill>
+                <a:latin typeface="Noto Sans JP"/>
+              </a:rPr>
+              <a:t>　パスワード変更が強制されます</a:t>
             </a:r>
           </a:p>
         </p:txBody>
       </p:sp>
       <p:pic>
         <p:nvPicPr>
-          <p:cNvPr id="10" name="Picture 9" descr="16_settings_user_mgmt.png"/>
+          <p:cNvPr id="10" name="Picture 9" descr="15_settings_account.png"/>
           <p:cNvPicPr>
             <a:picLocks noChangeAspect="1"/>
           </p:cNvPicPr>
@@ -8879,7 +9175,7 @@
             <a:avLst/>
           </a:prstGeom>
           <a:solidFill>
-            <a:srgbClr val="735763"/>
+            <a:srgbClr val="1A2B4A"/>
           </a:solidFill>
           <a:ln>
             <a:noFill/>
@@ -8937,7 +9233,7 @@
                 </a:solidFill>
                 <a:latin typeface="Noto Sans JP"/>
               </a:rPr>
-              <a:t>通知メール設定</a:t>
+              <a:t>パスワード変更（/admin/change-password）</a:t>
             </a:r>
           </a:p>
         </p:txBody>
@@ -8950,14 +9246,14 @@
         </p:nvSpPr>
         <p:spPr>
           <a:xfrm>
-            <a:off x="9994392" y="91440"/>
-            <a:ext cx="2011680" cy="411480"/>
+            <a:off x="9811512" y="91440"/>
+            <a:ext cx="2194560" cy="411480"/>
           </a:xfrm>
           <a:prstGeom prst="rect">
             <a:avLst/>
           </a:prstGeom>
           <a:solidFill>
-            <a:srgbClr val="735763"/>
+            <a:srgbClr val="1A2B4A"/>
           </a:solidFill>
           <a:ln>
             <a:noFill/>
@@ -8993,8 +9289,8 @@
         </p:nvSpPr>
         <p:spPr>
           <a:xfrm>
-            <a:off x="9994392" y="91440"/>
-            <a:ext cx="2011680" cy="411480"/>
+            <a:off x="9811512" y="91440"/>
+            <a:ext cx="2194560" cy="411480"/>
           </a:xfrm>
           <a:prstGeom prst="rect">
             <a:avLst/>
@@ -9011,7 +9307,7 @@
             <a:r>
               <a:rPr sz="1300" b="1">
                 <a:solidFill>
-                  <a:srgbClr val="FFFFFF"/>
+                  <a:srgbClr val="1A2B4A"/>
                 </a:solidFill>
                 <a:latin typeface="Noto Sans JP"/>
               </a:rPr>
@@ -9035,7 +9331,7 @@
             <a:avLst/>
           </a:prstGeom>
           <a:solidFill>
-            <a:srgbClr val="FCF0DE"/>
+            <a:srgbClr val="F8F5EE"/>
           </a:solidFill>
           <a:ln>
             <a:noFill/>
@@ -9087,13 +9383,13 @@
           <a:p>
             <a:pPr algn="l"/>
             <a:r>
-              <a:rPr sz="1300" b="0">
-                <a:solidFill>
-                  <a:srgbClr val="8B7355"/>
-                </a:solidFill>
-                <a:latin typeface="Noto Sans JP"/>
-              </a:rPr>
-              <a:t>自動メール配信の仕組み</a:t>
+              <a:rPr sz="1200" b="0">
+                <a:solidFill>
+                  <a:srgbClr val="6B7C9E"/>
+                </a:solidFill>
+                <a:latin typeface="Noto Sans JP"/>
+              </a:rPr>
+              <a:t>管理者パスワードの変更</a:t>
             </a:r>
           </a:p>
         </p:txBody>
@@ -9121,78 +9417,124 @@
           <a:lstStyle/>
           <a:p>
             <a:r>
-              <a:rPr sz="1500" b="1">
-                <a:solidFill>
-                  <a:srgbClr val="735763"/>
-                </a:solidFill>
-                <a:latin typeface="Noto Sans JP"/>
-              </a:rPr>
-              <a:t>予約通知メール</a:t>
-            </a:r>
-          </a:p>
-          <a:p>
-            <a:pPr lvl="1"/>
+              <a:rPr sz="1400" b="1">
+                <a:solidFill>
+                  <a:srgbClr val="1A2B4A"/>
+                </a:solidFill>
+                <a:latin typeface="Noto Sans JP"/>
+              </a:rPr>
+              <a:t>パスワード変更手順</a:t>
+            </a:r>
+          </a:p>
+          <a:p>
             <a:r>
               <a:rPr sz="1300">
                 <a:solidFill>
-                  <a:srgbClr val="3D2B1F"/>
-                </a:solidFill>
-                <a:latin typeface="Noto Sans JP"/>
-              </a:rPr>
-              <a:t>・予約完了時に患者へ自動送信</a:t>
-            </a:r>
-          </a:p>
-          <a:p>
-            <a:pPr lvl="1"/>
+                  <a:srgbClr val="1A2B4A"/>
+                </a:solidFill>
+                <a:latin typeface="Noto Sans JP"/>
+              </a:rPr>
+              <a:t>・現在のパスワードを入力</a:t>
+            </a:r>
+          </a:p>
+          <a:p>
             <a:r>
               <a:rPr sz="1300">
                 <a:solidFill>
-                  <a:srgbClr val="3D2B1F"/>
-                </a:solidFill>
-                <a:latin typeface="Noto Sans JP"/>
-              </a:rPr>
-              <a:t>・院内情報の連絡先が差出人に設定</a:t>
-            </a:r>
-          </a:p>
-          <a:p>
-            <a:pPr lvl="1"/>
+                  <a:srgbClr val="1A2B4A"/>
+                </a:solidFill>
+                <a:latin typeface="Noto Sans JP"/>
+              </a:rPr>
+              <a:t>・新しいパスワードを入力</a:t>
+            </a:r>
+          </a:p>
+          <a:p>
             <a:r>
               <a:rPr sz="1300">
                 <a:solidFill>
-                  <a:srgbClr val="3D2B1F"/>
-                </a:solidFill>
-                <a:latin typeface="Noto Sans JP"/>
-              </a:rPr>
-              <a:t>・キャンセル時も通知メールを送信</a:t>
-            </a:r>
-          </a:p>
-          <a:p>
-            <a:r>
-              <a:rPr sz="600"/>
+                  <a:srgbClr val="1A2B4A"/>
+                </a:solidFill>
+                <a:latin typeface="Noto Sans JP"/>
+              </a:rPr>
+              <a:t>・確認用パスワードを再入力</a:t>
+            </a:r>
+          </a:p>
+          <a:p>
+            <a:r>
+              <a:rPr sz="1300">
+                <a:solidFill>
+                  <a:srgbClr val="1A2B4A"/>
+                </a:solidFill>
+                <a:latin typeface="Noto Sans JP"/>
+              </a:rPr>
+              <a:t>・「変更する」をクリック</a:t>
+            </a:r>
+          </a:p>
+          <a:p>
+            <a:r>
+              <a:rPr sz="500"/>
               <a:t/>
             </a:r>
           </a:p>
           <a:p>
             <a:r>
-              <a:rPr sz="1500" b="1">
-                <a:solidFill>
-                  <a:srgbClr val="735763"/>
-                </a:solidFill>
-                <a:latin typeface="Noto Sans JP"/>
-              </a:rPr>
-              <a:t>カスタマイズ</a:t>
-            </a:r>
-          </a:p>
-          <a:p>
-            <a:pPr lvl="1"/>
+              <a:rPr sz="1400" b="1">
+                <a:solidFill>
+                  <a:srgbClr val="1A2B4A"/>
+                </a:solidFill>
+                <a:latin typeface="Noto Sans JP"/>
+              </a:rPr>
+              <a:t>パスワード要件</a:t>
+            </a:r>
+          </a:p>
+          <a:p>
             <a:r>
               <a:rPr sz="1300">
                 <a:solidFill>
-                  <a:srgbClr val="3D2B1F"/>
-                </a:solidFill>
-                <a:latin typeface="Noto Sans JP"/>
-              </a:rPr>
-              <a:t>・メール文面は Firebase Functions で管理</a:t>
+                  <a:srgbClr val="1A2B4A"/>
+                </a:solidFill>
+                <a:latin typeface="Noto Sans JP"/>
+              </a:rPr>
+              <a:t>・8文字以上</a:t>
+            </a:r>
+          </a:p>
+          <a:p>
+            <a:r>
+              <a:rPr sz="1300">
+                <a:solidFill>
+                  <a:srgbClr val="1A2B4A"/>
+                </a:solidFill>
+                <a:latin typeface="Noto Sans JP"/>
+              </a:rPr>
+              <a:t>・大文字・小文字・数字・記号</a:t>
+            </a:r>
+          </a:p>
+          <a:p>
+            <a:r>
+              <a:rPr sz="1300">
+                <a:solidFill>
+                  <a:srgbClr val="1A2B4A"/>
+                </a:solidFill>
+                <a:latin typeface="Noto Sans JP"/>
+              </a:rPr>
+              <a:t>　各1文字以上必須</a:t>
+            </a:r>
+          </a:p>
+          <a:p>
+            <a:r>
+              <a:rPr sz="500"/>
+              <a:t/>
+            </a:r>
+          </a:p>
+          <a:p>
+            <a:r>
+              <a:rPr sz="1200">
+                <a:solidFill>
+                  <a:srgbClr val="B45A00"/>
+                </a:solidFill>
+                <a:latin typeface="Noto Sans JP"/>
+              </a:rPr>
+              <a:t>⚠ 初回ログイン時は変更必須です</a:t>
             </a:r>
           </a:p>
         </p:txBody>
@@ -9264,7 +9606,7 @@
           <a:p>
             <a:pPr algn="ctr"/>
             <a:r>
-              <a:rPr sz="1400" b="0">
+              <a:rPr sz="1300" b="0">
                 <a:solidFill>
                   <a:srgbClr val="666666"/>
                 </a:solidFill>
@@ -9308,7 +9650,7 @@
             <a:avLst/>
           </a:prstGeom>
           <a:solidFill>
-            <a:srgbClr val="735763"/>
+            <a:srgbClr val="FFFFFF"/>
           </a:solidFill>
           <a:ln>
             <a:noFill/>
@@ -9345,13 +9687,13 @@
         <p:spPr>
           <a:xfrm>
             <a:off x="0" y="0"/>
-            <a:ext cx="164592" cy="6858000"/>
+            <a:ext cx="12188952" cy="594360"/>
           </a:xfrm>
           <a:prstGeom prst="rect">
             <a:avLst/>
           </a:prstGeom>
           <a:solidFill>
-            <a:srgbClr val="F79321"/>
+            <a:srgbClr val="1A2B4A"/>
           </a:solidFill>
           <a:ln>
             <a:noFill/>
@@ -9387,8 +9729,8 @@
         </p:nvSpPr>
         <p:spPr>
           <a:xfrm>
-            <a:off x="548640" y="2377440"/>
-            <a:ext cx="10972800" cy="1280160"/>
+            <a:off x="274320" y="73152"/>
+            <a:ext cx="8686800" cy="594360"/>
           </a:xfrm>
           <a:prstGeom prst="rect">
             <a:avLst/>
@@ -9401,15 +9743,15 @@
           </a:bodyPr>
           <a:lstStyle/>
           <a:p>
-            <a:pPr algn="ctr"/>
-            <a:r>
-              <a:rPr sz="4000" b="1">
+            <a:pPr algn="l"/>
+            <a:r>
+              <a:rPr sz="2200" b="1">
                 <a:solidFill>
                   <a:srgbClr val="FFFFFF"/>
                 </a:solidFill>
                 <a:latin typeface="Noto Sans JP"/>
               </a:rPr>
-              <a:t>ご利用ありがとうございます</a:t>
+              <a:t>通知メール・リマインダー</a:t>
             </a:r>
           </a:p>
         </p:txBody>
@@ -9422,14 +9764,14 @@
         </p:nvSpPr>
         <p:spPr>
           <a:xfrm>
-            <a:off x="3200400" y="3657600"/>
-            <a:ext cx="5760720" cy="54864"/>
+            <a:off x="9811512" y="91440"/>
+            <a:ext cx="2194560" cy="411480"/>
           </a:xfrm>
           <a:prstGeom prst="rect">
             <a:avLst/>
           </a:prstGeom>
           <a:solidFill>
-            <a:srgbClr val="F79321"/>
+            <a:srgbClr val="1A2B4A"/>
           </a:solidFill>
           <a:ln>
             <a:noFill/>
@@ -9465,8 +9807,8 @@
         </p:nvSpPr>
         <p:spPr>
           <a:xfrm>
-            <a:off x="548640" y="3931920"/>
-            <a:ext cx="10972800" cy="640080"/>
+            <a:off x="9811512" y="91440"/>
+            <a:ext cx="2194560" cy="411480"/>
           </a:xfrm>
           <a:prstGeom prst="rect">
             <a:avLst/>
@@ -9481,9 +9823,533 @@
           <a:p>
             <a:pPr algn="ctr"/>
             <a:r>
+              <a:rPr sz="1300" b="1">
+                <a:solidFill>
+                  <a:srgbClr val="1A2B4A"/>
+                </a:solidFill>
+                <a:latin typeface="Noto Sans JP"/>
+              </a:rPr>
+              <a:t>管理者向け</a:t>
+            </a:r>
+          </a:p>
+        </p:txBody>
+      </p:sp>
+      <p:sp>
+        <p:nvSpPr>
+          <p:cNvPr id="7" name="Rectangle 6"/>
+          <p:cNvSpPr/>
+          <p:nvPr/>
+        </p:nvSpPr>
+        <p:spPr>
+          <a:xfrm>
+            <a:off x="0" y="685800"/>
+            <a:ext cx="3931920" cy="6035040"/>
+          </a:xfrm>
+          <a:prstGeom prst="rect">
+            <a:avLst/>
+          </a:prstGeom>
+          <a:solidFill>
+            <a:srgbClr val="F8F5EE"/>
+          </a:solidFill>
+          <a:ln>
+            <a:noFill/>
+          </a:ln>
+        </p:spPr>
+        <p:style>
+          <a:lnRef idx="1">
+            <a:schemeClr val="accent1"/>
+          </a:lnRef>
+          <a:fillRef idx="3">
+            <a:schemeClr val="accent1"/>
+          </a:fillRef>
+          <a:effectRef idx="2">
+            <a:schemeClr val="accent1"/>
+          </a:effectRef>
+          <a:fontRef idx="minor">
+            <a:schemeClr val="lt1"/>
+          </a:fontRef>
+        </p:style>
+        <p:txBody>
+          <a:bodyPr rtlCol="0" anchor="ctr"/>
+          <a:lstStyle/>
+          <a:p>
+            <a:pPr algn="ctr"/>
+          </a:p>
+        </p:txBody>
+      </p:sp>
+      <p:sp>
+        <p:nvSpPr>
+          <p:cNvPr id="8" name="TextBox 7"/>
+          <p:cNvSpPr txBox="1"/>
+          <p:nvPr/>
+        </p:nvSpPr>
+        <p:spPr>
+          <a:xfrm>
+            <a:off x="228600" y="822960"/>
+            <a:ext cx="3657600" cy="457200"/>
+          </a:xfrm>
+          <a:prstGeom prst="rect">
+            <a:avLst/>
+          </a:prstGeom>
+          <a:noFill/>
+        </p:spPr>
+        <p:txBody>
+          <a:bodyPr wrap="square">
+            <a:spAutoFit/>
+          </a:bodyPr>
+          <a:lstStyle/>
+          <a:p>
+            <a:pPr algn="l"/>
+            <a:r>
+              <a:rPr sz="1200" b="0">
+                <a:solidFill>
+                  <a:srgbClr val="6B7C9E"/>
+                </a:solidFill>
+                <a:latin typeface="Noto Sans JP"/>
+              </a:rPr>
+              <a:t>自動メール配信の仕組み</a:t>
+            </a:r>
+          </a:p>
+        </p:txBody>
+      </p:sp>
+      <p:sp>
+        <p:nvSpPr>
+          <p:cNvPr id="9" name="TextBox 8"/>
+          <p:cNvSpPr txBox="1"/>
+          <p:nvPr/>
+        </p:nvSpPr>
+        <p:spPr>
+          <a:xfrm>
+            <a:off x="228600" y="1188720"/>
+            <a:ext cx="3657600" cy="5440680"/>
+          </a:xfrm>
+          <a:prstGeom prst="rect">
+            <a:avLst/>
+          </a:prstGeom>
+          <a:noFill/>
+        </p:spPr>
+        <p:txBody>
+          <a:bodyPr wrap="square">
+            <a:spAutoFit/>
+          </a:bodyPr>
+          <a:lstStyle/>
+          <a:p>
+            <a:r>
+              <a:rPr sz="1400" b="1">
+                <a:solidFill>
+                  <a:srgbClr val="1A2B4A"/>
+                </a:solidFill>
+                <a:latin typeface="Noto Sans JP"/>
+              </a:rPr>
+              <a:t>予約確認メール（自動）</a:t>
+            </a:r>
+          </a:p>
+          <a:p>
+            <a:r>
+              <a:rPr sz="1300">
+                <a:solidFill>
+                  <a:srgbClr val="1A2B4A"/>
+                </a:solidFill>
+                <a:latin typeface="Noto Sans JP"/>
+              </a:rPr>
+              <a:t>・予約完了時に患者へ自動送信</a:t>
+            </a:r>
+          </a:p>
+          <a:p>
+            <a:r>
+              <a:rPr sz="1300">
+                <a:solidFill>
+                  <a:srgbClr val="1A2B4A"/>
+                </a:solidFill>
+                <a:latin typeface="Noto Sans JP"/>
+              </a:rPr>
+              <a:t>・院内情報の連絡先が差出人</a:t>
+            </a:r>
+          </a:p>
+          <a:p>
+            <a:r>
+              <a:rPr sz="500"/>
+              <a:t/>
+            </a:r>
+          </a:p>
+          <a:p>
+            <a:r>
+              <a:rPr sz="1400" b="1">
+                <a:solidFill>
+                  <a:srgbClr val="1A2B4A"/>
+                </a:solidFill>
+                <a:latin typeface="Noto Sans JP"/>
+              </a:rPr>
+              <a:t>キャンセル通知メール（自動）</a:t>
+            </a:r>
+          </a:p>
+          <a:p>
+            <a:r>
+              <a:rPr sz="1300">
+                <a:solidFill>
+                  <a:srgbClr val="1A2B4A"/>
+                </a:solidFill>
+                <a:latin typeface="Noto Sans JP"/>
+              </a:rPr>
+              <a:t>・キャンセル完了時に自動送信</a:t>
+            </a:r>
+          </a:p>
+          <a:p>
+            <a:r>
+              <a:rPr sz="500"/>
+              <a:t/>
+            </a:r>
+          </a:p>
+          <a:p>
+            <a:r>
+              <a:rPr sz="1400" b="1">
+                <a:solidFill>
+                  <a:srgbClr val="1A2B4A"/>
+                </a:solidFill>
+                <a:latin typeface="Noto Sans JP"/>
+              </a:rPr>
+              <a:t>リマインダーメール（毎日自動）</a:t>
+            </a:r>
+          </a:p>
+          <a:p>
+            <a:r>
+              <a:rPr sz="1300">
+                <a:solidFill>
+                  <a:srgbClr val="1A2B4A"/>
+                </a:solidFill>
+                <a:latin typeface="Noto Sans JP"/>
+              </a:rPr>
+              <a:t>・翌日の予約者へ前日夜に送信</a:t>
+            </a:r>
+          </a:p>
+          <a:p>
+            <a:r>
+              <a:rPr sz="1300">
+                <a:solidFill>
+                  <a:srgbClr val="1A2B4A"/>
+                </a:solidFill>
+                <a:latin typeface="Noto Sans JP"/>
+              </a:rPr>
+              <a:t>・Cloud Functions スケジュール実行</a:t>
+            </a:r>
+          </a:p>
+          <a:p>
+            <a:r>
+              <a:rPr sz="1300">
+                <a:solidFill>
+                  <a:srgbClr val="1A2B4A"/>
+                </a:solidFill>
+                <a:latin typeface="Noto Sans JP"/>
+              </a:rPr>
+              <a:t>・(sendDailyReminders)</a:t>
+            </a:r>
+          </a:p>
+          <a:p>
+            <a:r>
+              <a:rPr sz="500"/>
+              <a:t/>
+            </a:r>
+          </a:p>
+          <a:p>
+            <a:r>
+              <a:rPr sz="1200">
+                <a:solidFill>
+                  <a:srgbClr val="B45A00"/>
+                </a:solidFill>
+                <a:latin typeface="Noto Sans JP"/>
+              </a:rPr>
+              <a:t>⚠ メール送信は Resend API を使用</a:t>
+            </a:r>
+          </a:p>
+        </p:txBody>
+      </p:sp>
+      <p:sp>
+        <p:nvSpPr>
+          <p:cNvPr id="10" name="Rectangle 9"/>
+          <p:cNvSpPr/>
+          <p:nvPr/>
+        </p:nvSpPr>
+        <p:spPr>
+          <a:xfrm>
+            <a:off x="4160520" y="868680"/>
+            <a:ext cx="7845552" cy="5669280"/>
+          </a:xfrm>
+          <a:prstGeom prst="rect">
+            <a:avLst/>
+          </a:prstGeom>
+          <a:solidFill>
+            <a:srgbClr val="CCCCCC"/>
+          </a:solidFill>
+          <a:ln>
+            <a:noFill/>
+          </a:ln>
+        </p:spPr>
+        <p:style>
+          <a:lnRef idx="1">
+            <a:schemeClr val="accent1"/>
+          </a:lnRef>
+          <a:fillRef idx="3">
+            <a:schemeClr val="accent1"/>
+          </a:fillRef>
+          <a:effectRef idx="2">
+            <a:schemeClr val="accent1"/>
+          </a:effectRef>
+          <a:fontRef idx="minor">
+            <a:schemeClr val="lt1"/>
+          </a:fontRef>
+        </p:style>
+        <p:txBody>
+          <a:bodyPr rtlCol="0" anchor="ctr"/>
+          <a:lstStyle/>
+          <a:p>
+            <a:pPr algn="ctr"/>
+          </a:p>
+        </p:txBody>
+      </p:sp>
+      <p:sp>
+        <p:nvSpPr>
+          <p:cNvPr id="11" name="TextBox 10"/>
+          <p:cNvSpPr txBox="1"/>
+          <p:nvPr/>
+        </p:nvSpPr>
+        <p:spPr>
+          <a:xfrm>
+            <a:off x="4160520" y="3429000"/>
+            <a:ext cx="7845552" cy="548640"/>
+          </a:xfrm>
+          <a:prstGeom prst="rect">
+            <a:avLst/>
+          </a:prstGeom>
+          <a:noFill/>
+        </p:spPr>
+        <p:txBody>
+          <a:bodyPr wrap="square">
+            <a:spAutoFit/>
+          </a:bodyPr>
+          <a:lstStyle/>
+          <a:p>
+            <a:pPr algn="ctr"/>
+            <a:r>
+              <a:rPr sz="1300" b="0">
+                <a:solidFill>
+                  <a:srgbClr val="666666"/>
+                </a:solidFill>
+                <a:latin typeface="Noto Sans JP"/>
+              </a:rPr>
+              <a:t>（スクリーンショット準備中）</a:t>
+            </a:r>
+          </a:p>
+        </p:txBody>
+      </p:sp>
+    </p:spTree>
+  </p:cSld>
+  <p:clrMapOvr>
+    <a:masterClrMapping/>
+  </p:clrMapOvr>
+</p:sld>
+</file>
+
+<file path=ppt/slides/slide23.xml><?xml version="1.0" encoding="utf-8"?>
+<p:sld xmlns:a="http://schemas.openxmlformats.org/drawingml/2006/main" xmlns:p="http://schemas.openxmlformats.org/presentationml/2006/main" xmlns:r="http://schemas.openxmlformats.org/officeDocument/2006/relationships">
+  <p:cSld>
+    <p:spTree>
+      <p:nvGrpSpPr>
+        <p:cNvPr id="1" name=""/>
+        <p:cNvGrpSpPr/>
+        <p:nvPr/>
+      </p:nvGrpSpPr>
+      <p:grpSpPr/>
+      <p:sp>
+        <p:nvSpPr>
+          <p:cNvPr id="2" name="Rectangle 1"/>
+          <p:cNvSpPr/>
+          <p:nvPr/>
+        </p:nvSpPr>
+        <p:spPr>
+          <a:xfrm>
+            <a:off x="0" y="0"/>
+            <a:ext cx="12188952" cy="6858000"/>
+          </a:xfrm>
+          <a:prstGeom prst="rect">
+            <a:avLst/>
+          </a:prstGeom>
+          <a:solidFill>
+            <a:srgbClr val="1A2B4A"/>
+          </a:solidFill>
+          <a:ln>
+            <a:noFill/>
+          </a:ln>
+        </p:spPr>
+        <p:style>
+          <a:lnRef idx="1">
+            <a:schemeClr val="accent1"/>
+          </a:lnRef>
+          <a:fillRef idx="3">
+            <a:schemeClr val="accent1"/>
+          </a:fillRef>
+          <a:effectRef idx="2">
+            <a:schemeClr val="accent1"/>
+          </a:effectRef>
+          <a:fontRef idx="minor">
+            <a:schemeClr val="lt1"/>
+          </a:fontRef>
+        </p:style>
+        <p:txBody>
+          <a:bodyPr rtlCol="0" anchor="ctr"/>
+          <a:lstStyle/>
+          <a:p>
+            <a:pPr algn="ctr"/>
+          </a:p>
+        </p:txBody>
+      </p:sp>
+      <p:sp>
+        <p:nvSpPr>
+          <p:cNvPr id="3" name="Rectangle 2"/>
+          <p:cNvSpPr/>
+          <p:nvPr/>
+        </p:nvSpPr>
+        <p:spPr>
+          <a:xfrm>
+            <a:off x="0" y="0"/>
+            <a:ext cx="164592" cy="6858000"/>
+          </a:xfrm>
+          <a:prstGeom prst="rect">
+            <a:avLst/>
+          </a:prstGeom>
+          <a:solidFill>
+            <a:srgbClr val="D4AF37"/>
+          </a:solidFill>
+          <a:ln>
+            <a:noFill/>
+          </a:ln>
+        </p:spPr>
+        <p:style>
+          <a:lnRef idx="1">
+            <a:schemeClr val="accent1"/>
+          </a:lnRef>
+          <a:fillRef idx="3">
+            <a:schemeClr val="accent1"/>
+          </a:fillRef>
+          <a:effectRef idx="2">
+            <a:schemeClr val="accent1"/>
+          </a:effectRef>
+          <a:fontRef idx="minor">
+            <a:schemeClr val="lt1"/>
+          </a:fontRef>
+        </p:style>
+        <p:txBody>
+          <a:bodyPr rtlCol="0" anchor="ctr"/>
+          <a:lstStyle/>
+          <a:p>
+            <a:pPr algn="ctr"/>
+          </a:p>
+        </p:txBody>
+      </p:sp>
+      <p:sp>
+        <p:nvSpPr>
+          <p:cNvPr id="4" name="TextBox 3"/>
+          <p:cNvSpPr txBox="1"/>
+          <p:nvPr/>
+        </p:nvSpPr>
+        <p:spPr>
+          <a:xfrm>
+            <a:off x="548640" y="2377440"/>
+            <a:ext cx="10972800" cy="1280160"/>
+          </a:xfrm>
+          <a:prstGeom prst="rect">
+            <a:avLst/>
+          </a:prstGeom>
+          <a:noFill/>
+        </p:spPr>
+        <p:txBody>
+          <a:bodyPr wrap="square">
+            <a:spAutoFit/>
+          </a:bodyPr>
+          <a:lstStyle/>
+          <a:p>
+            <a:pPr algn="ctr"/>
+            <a:r>
+              <a:rPr sz="4000" b="1">
+                <a:solidFill>
+                  <a:srgbClr val="FFFFFF"/>
+                </a:solidFill>
+                <a:latin typeface="Noto Sans JP"/>
+              </a:rPr>
+              <a:t>ご利用ありがとうございます</a:t>
+            </a:r>
+          </a:p>
+        </p:txBody>
+      </p:sp>
+      <p:sp>
+        <p:nvSpPr>
+          <p:cNvPr id="5" name="Rectangle 4"/>
+          <p:cNvSpPr/>
+          <p:nvPr/>
+        </p:nvSpPr>
+        <p:spPr>
+          <a:xfrm>
+            <a:off x="3200400" y="3657600"/>
+            <a:ext cx="5760720" cy="54864"/>
+          </a:xfrm>
+          <a:prstGeom prst="rect">
+            <a:avLst/>
+          </a:prstGeom>
+          <a:solidFill>
+            <a:srgbClr val="D4AF37"/>
+          </a:solidFill>
+          <a:ln>
+            <a:noFill/>
+          </a:ln>
+        </p:spPr>
+        <p:style>
+          <a:lnRef idx="1">
+            <a:schemeClr val="accent1"/>
+          </a:lnRef>
+          <a:fillRef idx="3">
+            <a:schemeClr val="accent1"/>
+          </a:fillRef>
+          <a:effectRef idx="2">
+            <a:schemeClr val="accent1"/>
+          </a:effectRef>
+          <a:fontRef idx="minor">
+            <a:schemeClr val="lt1"/>
+          </a:fontRef>
+        </p:style>
+        <p:txBody>
+          <a:bodyPr rtlCol="0" anchor="ctr"/>
+          <a:lstStyle/>
+          <a:p>
+            <a:pPr algn="ctr"/>
+          </a:p>
+        </p:txBody>
+      </p:sp>
+      <p:sp>
+        <p:nvSpPr>
+          <p:cNvPr id="6" name="TextBox 5"/>
+          <p:cNvSpPr txBox="1"/>
+          <p:nvPr/>
+        </p:nvSpPr>
+        <p:spPr>
+          <a:xfrm>
+            <a:off x="548640" y="3931920"/>
+            <a:ext cx="10972800" cy="640080"/>
+          </a:xfrm>
+          <a:prstGeom prst="rect">
+            <a:avLst/>
+          </a:prstGeom>
+          <a:noFill/>
+        </p:spPr>
+        <p:txBody>
+          <a:bodyPr wrap="square">
+            <a:spAutoFit/>
+          </a:bodyPr>
+          <a:lstStyle/>
+          <a:p>
+            <a:pPr algn="ctr"/>
+            <a:r>
               <a:rPr sz="2000" b="0">
                 <a:solidFill>
-                  <a:srgbClr val="F79321"/>
+                  <a:srgbClr val="D4AF37"/>
                 </a:solidFill>
                 <a:latin typeface="Noto Sans JP"/>
               </a:rPr>
@@ -9560,7 +10426,7 @@
             <a:avLst/>
           </a:prstGeom>
           <a:solidFill>
-            <a:srgbClr val="735763"/>
+            <a:srgbClr val="1A2B4A"/>
           </a:solidFill>
           <a:ln>
             <a:noFill/>
@@ -9603,7 +10469,7 @@
             <a:avLst/>
           </a:prstGeom>
           <a:solidFill>
-            <a:srgbClr val="F79321"/>
+            <a:srgbClr val="D4AF37"/>
           </a:solidFill>
           <a:ln>
             <a:noFill/>
@@ -9657,7 +10523,7 @@
             <a:r>
               <a:rPr sz="4200" b="1">
                 <a:solidFill>
-                  <a:srgbClr val="FCF0DE"/>
+                  <a:srgbClr val="FFFFFF"/>
                 </a:solidFill>
                 <a:latin typeface="Noto Sans JP"/>
               </a:rPr>
@@ -9681,7 +10547,7 @@
             <a:avLst/>
           </a:prstGeom>
           <a:solidFill>
-            <a:srgbClr val="F79321"/>
+            <a:srgbClr val="D4AF37"/>
           </a:solidFill>
           <a:ln>
             <a:noFill/>
@@ -9735,11 +10601,11 @@
             <a:r>
               <a:rPr sz="1600" b="0">
                 <a:solidFill>
-                  <a:srgbClr val="FFD5A0"/>
-                </a:solidFill>
-                <a:latin typeface="Noto Sans JP"/>
-              </a:rPr>
-              <a:t>▸  トップページ（カレンダー）</a:t>
+                  <a:srgbClr val="FFE080"/>
+                </a:solidFill>
+                <a:latin typeface="Noto Sans JP"/>
+              </a:rPr>
+              <a:t>▸  カレンダーで日時を選択</a:t>
             </a:r>
           </a:p>
         </p:txBody>
@@ -9770,11 +10636,11 @@
             <a:r>
               <a:rPr sz="1600" b="0">
                 <a:solidFill>
-                  <a:srgbClr val="FFD5A0"/>
-                </a:solidFill>
-                <a:latin typeface="Noto Sans JP"/>
-              </a:rPr>
-              <a:t>▸  時間枠の選択</a:t>
+                  <a:srgbClr val="FFE080"/>
+                </a:solidFill>
+                <a:latin typeface="Noto Sans JP"/>
+              </a:rPr>
+              <a:t>▸  お客様情報を入力（郵便番号自動補完）</a:t>
             </a:r>
           </a:p>
         </p:txBody>
@@ -9805,11 +10671,11 @@
             <a:r>
               <a:rPr sz="1600" b="0">
                 <a:solidFill>
-                  <a:srgbClr val="FFD5A0"/>
-                </a:solidFill>
-                <a:latin typeface="Noto Sans JP"/>
-              </a:rPr>
-              <a:t>▸  お客様情報入力</a:t>
+                  <a:srgbClr val="FFE080"/>
+                </a:solidFill>
+                <a:latin typeface="Noto Sans JP"/>
+              </a:rPr>
+              <a:t>▸  確認 → 予約完了</a:t>
             </a:r>
           </a:p>
         </p:txBody>
@@ -9840,11 +10706,11 @@
             <a:r>
               <a:rPr sz="1600" b="0">
                 <a:solidFill>
-                  <a:srgbClr val="FFD5A0"/>
-                </a:solidFill>
-                <a:latin typeface="Noto Sans JP"/>
-              </a:rPr>
-              <a:t>▸  確認画面</a:t>
+                  <a:srgbClr val="FFE080"/>
+                </a:solidFill>
+                <a:latin typeface="Noto Sans JP"/>
+              </a:rPr>
+              <a:t>▸  キャンセル・プライバシーポリシー</a:t>
             </a:r>
           </a:p>
         </p:txBody>
@@ -9875,81 +10741,11 @@
             <a:r>
               <a:rPr sz="1600" b="0">
                 <a:solidFill>
-                  <a:srgbClr val="FFD5A0"/>
-                </a:solidFill>
-                <a:latin typeface="Noto Sans JP"/>
-              </a:rPr>
-              <a:t>▸  予約キャンセル</a:t>
-            </a:r>
-          </a:p>
-        </p:txBody>
-      </p:sp>
-      <p:sp>
-        <p:nvSpPr>
-          <p:cNvPr id="11" name="TextBox 10"/>
-          <p:cNvSpPr txBox="1"/>
-          <p:nvPr/>
-        </p:nvSpPr>
-        <p:spPr>
-          <a:xfrm>
-            <a:off x="731520" y="5715000"/>
-            <a:ext cx="9144000" cy="411480"/>
-          </a:xfrm>
-          <a:prstGeom prst="rect">
-            <a:avLst/>
-          </a:prstGeom>
-          <a:noFill/>
-        </p:spPr>
-        <p:txBody>
-          <a:bodyPr wrap="square">
-            <a:spAutoFit/>
-          </a:bodyPr>
-          <a:lstStyle/>
-          <a:p>
-            <a:pPr algn="l"/>
-            <a:r>
-              <a:rPr sz="1600" b="0">
-                <a:solidFill>
-                  <a:srgbClr val="FFD5A0"/>
-                </a:solidFill>
-                <a:latin typeface="Noto Sans JP"/>
-              </a:rPr>
-              <a:t>▸  プライバシーポリシー</a:t>
-            </a:r>
-          </a:p>
-        </p:txBody>
-      </p:sp>
-      <p:sp>
-        <p:nvSpPr>
-          <p:cNvPr id="12" name="TextBox 11"/>
-          <p:cNvSpPr txBox="1"/>
-          <p:nvPr/>
-        </p:nvSpPr>
-        <p:spPr>
-          <a:xfrm>
-            <a:off x="731520" y="6126480"/>
-            <a:ext cx="9144000" cy="411480"/>
-          </a:xfrm>
-          <a:prstGeom prst="rect">
-            <a:avLst/>
-          </a:prstGeom>
-          <a:noFill/>
-        </p:spPr>
-        <p:txBody>
-          <a:bodyPr wrap="square">
-            <a:spAutoFit/>
-          </a:bodyPr>
-          <a:lstStyle/>
-          <a:p>
-            <a:pPr algn="l"/>
-            <a:r>
-              <a:rPr sz="1600" b="0">
-                <a:solidFill>
-                  <a:srgbClr val="FFD5A0"/>
-                </a:solidFill>
-                <a:latin typeface="Noto Sans JP"/>
-              </a:rPr>
-              <a:t>▸  モバイル対応</a:t>
+                  <a:srgbClr val="FFE080"/>
+                </a:solidFill>
+                <a:latin typeface="Noto Sans JP"/>
+              </a:rPr>
+              <a:t>▸  スマートフォン対応</a:t>
             </a:r>
           </a:p>
         </p:txBody>
@@ -10030,7 +10826,7 @@
             <a:avLst/>
           </a:prstGeom>
           <a:solidFill>
-            <a:srgbClr val="735763"/>
+            <a:srgbClr val="1A2B4A"/>
           </a:solidFill>
           <a:ln>
             <a:noFill/>
@@ -10101,14 +10897,14 @@
         </p:nvSpPr>
         <p:spPr>
           <a:xfrm>
-            <a:off x="9994392" y="91440"/>
-            <a:ext cx="2011680" cy="411480"/>
+            <a:off x="9811512" y="91440"/>
+            <a:ext cx="2194560" cy="411480"/>
           </a:xfrm>
           <a:prstGeom prst="rect">
             <a:avLst/>
           </a:prstGeom>
           <a:solidFill>
-            <a:srgbClr val="F79321"/>
+            <a:srgbClr val="D4AF37"/>
           </a:solidFill>
           <a:ln>
             <a:noFill/>
@@ -10144,8 +10940,8 @@
         </p:nvSpPr>
         <p:spPr>
           <a:xfrm>
-            <a:off x="9994392" y="91440"/>
-            <a:ext cx="2011680" cy="411480"/>
+            <a:off x="9811512" y="91440"/>
+            <a:ext cx="2194560" cy="411480"/>
           </a:xfrm>
           <a:prstGeom prst="rect">
             <a:avLst/>
@@ -10162,7 +10958,7 @@
             <a:r>
               <a:rPr sz="1300" b="1">
                 <a:solidFill>
-                  <a:srgbClr val="FFFFFF"/>
+                  <a:srgbClr val="1A2B4A"/>
                 </a:solidFill>
                 <a:latin typeface="Noto Sans JP"/>
               </a:rPr>
@@ -10186,7 +10982,7 @@
             <a:avLst/>
           </a:prstGeom>
           <a:solidFill>
-            <a:srgbClr val="FCF0DE"/>
+            <a:srgbClr val="F8F5EE"/>
           </a:solidFill>
           <a:ln>
             <a:noFill/>
@@ -10238,13 +11034,13 @@
           <a:p>
             <a:pPr algn="l"/>
             <a:r>
-              <a:rPr sz="1300" b="0">
-                <a:solidFill>
-                  <a:srgbClr val="8B7355"/>
-                </a:solidFill>
-                <a:latin typeface="Noto Sans JP"/>
-              </a:rPr>
-              <a:t>予約受付の入口</a:t>
+              <a:rPr sz="1200" b="0">
+                <a:solidFill>
+                  <a:srgbClr val="6B7C9E"/>
+                </a:solidFill>
+                <a:latin typeface="Noto Sans JP"/>
+              </a:rPr>
+              <a:t>https://oas.kojinius.jp</a:t>
             </a:r>
           </a:p>
         </p:txBody>
@@ -10272,50 +11068,48 @@
           <a:lstStyle/>
           <a:p>
             <a:r>
-              <a:rPr sz="1500" b="1">
-                <a:solidFill>
-                  <a:srgbClr val="735763"/>
-                </a:solidFill>
-                <a:latin typeface="Noto Sans JP"/>
-              </a:rPr>
-              <a:t>アクセス方法</a:t>
-            </a:r>
-          </a:p>
-          <a:p>
-            <a:pPr lvl="1"/>
+              <a:rPr sz="1400" b="1">
+                <a:solidFill>
+                  <a:srgbClr val="1A2B4A"/>
+                </a:solidFill>
+                <a:latin typeface="Noto Sans JP"/>
+              </a:rPr>
+              <a:t>アクセス</a:t>
+            </a:r>
+          </a:p>
+          <a:p>
             <a:r>
               <a:rPr sz="1300">
                 <a:solidFill>
-                  <a:srgbClr val="3D2B1F"/>
-                </a:solidFill>
-                <a:latin typeface="Noto Sans JP"/>
-              </a:rPr>
-              <a:t>・ブラウザで https://oas.kojinius.jp を開く</a:t>
-            </a:r>
-          </a:p>
-          <a:p>
-            <a:pPr lvl="1"/>
+                  <a:srgbClr val="1A2B4A"/>
+                </a:solidFill>
+                <a:latin typeface="Noto Sans JP"/>
+              </a:rPr>
+              <a:t>・ブラウザで URL を開くだけ</a:t>
+            </a:r>
+          </a:p>
+          <a:p>
             <a:r>
               <a:rPr sz="1300">
                 <a:solidFill>
-                  <a:srgbClr val="3D2B1F"/>
-                </a:solidFill>
-                <a:latin typeface="Noto Sans JP"/>
-              </a:rPr>
-              <a:t>・予約可能日はカレンダーで表示</a:t>
-            </a:r>
-          </a:p>
-          <a:p>
-            <a:r>
-              <a:rPr sz="600"/>
+                  <a:srgbClr val="1A2B4A"/>
+                </a:solidFill>
+                <a:latin typeface="Noto Sans JP"/>
+              </a:rPr>
+              <a:t>・アプリインストール不要</a:t>
+            </a:r>
+          </a:p>
+          <a:p>
+            <a:r>
+              <a:rPr sz="500"/>
               <a:t/>
             </a:r>
           </a:p>
           <a:p>
             <a:r>
-              <a:rPr sz="1500" b="1">
-                <a:solidFill>
-                  <a:srgbClr val="735763"/>
+              <a:rPr sz="1400" b="1">
+                <a:solidFill>
+                  <a:srgbClr val="1A2B4A"/>
                 </a:solidFill>
                 <a:latin typeface="Noto Sans JP"/>
               </a:rPr>
@@ -10323,11 +11117,10 @@
             </a:r>
           </a:p>
           <a:p>
-            <a:pPr lvl="1"/>
             <a:r>
               <a:rPr sz="1300">
                 <a:solidFill>
-                  <a:srgbClr val="3D2B1F"/>
+                  <a:srgbClr val="1A2B4A"/>
                 </a:solidFill>
                 <a:latin typeface="Noto Sans JP"/>
               </a:rPr>
@@ -10335,15 +11128,25 @@
             </a:r>
           </a:p>
           <a:p>
-            <a:pPr lvl="1"/>
             <a:r>
               <a:rPr sz="1300">
                 <a:solidFill>
-                  <a:srgbClr val="3D2B1F"/>
-                </a:solidFill>
-                <a:latin typeface="Noto Sans JP"/>
-              </a:rPr>
-              <a:t>・通常 = 予約可能な日</a:t>
+                  <a:srgbClr val="1A2B4A"/>
+                </a:solidFill>
+                <a:latin typeface="Noto Sans JP"/>
+              </a:rPr>
+              <a:t>・通常色 = 予約可能な日</a:t>
+            </a:r>
+          </a:p>
+          <a:p>
+            <a:r>
+              <a:rPr sz="1300">
+                <a:solidFill>
+                  <a:srgbClr val="1A2B4A"/>
+                </a:solidFill>
+                <a:latin typeface="Noto Sans JP"/>
+              </a:rPr>
+              <a:t>・希望日をクリックで時間枠を表示</a:t>
             </a:r>
           </a:p>
         </p:txBody>
@@ -10448,7 +11251,7 @@
             <a:avLst/>
           </a:prstGeom>
           <a:solidFill>
-            <a:srgbClr val="735763"/>
+            <a:srgbClr val="1A2B4A"/>
           </a:solidFill>
           <a:ln>
             <a:noFill/>
@@ -10519,14 +11322,14 @@
         </p:nvSpPr>
         <p:spPr>
           <a:xfrm>
-            <a:off x="9994392" y="91440"/>
-            <a:ext cx="2011680" cy="411480"/>
+            <a:off x="9811512" y="91440"/>
+            <a:ext cx="2194560" cy="411480"/>
           </a:xfrm>
           <a:prstGeom prst="rect">
             <a:avLst/>
           </a:prstGeom>
           <a:solidFill>
-            <a:srgbClr val="F79321"/>
+            <a:srgbClr val="D4AF37"/>
           </a:solidFill>
           <a:ln>
             <a:noFill/>
@@ -10562,8 +11365,8 @@
         </p:nvSpPr>
         <p:spPr>
           <a:xfrm>
-            <a:off x="9994392" y="91440"/>
-            <a:ext cx="2011680" cy="411480"/>
+            <a:off x="9811512" y="91440"/>
+            <a:ext cx="2194560" cy="411480"/>
           </a:xfrm>
           <a:prstGeom prst="rect">
             <a:avLst/>
@@ -10580,7 +11383,7 @@
             <a:r>
               <a:rPr sz="1300" b="1">
                 <a:solidFill>
-                  <a:srgbClr val="FFFFFF"/>
+                  <a:srgbClr val="1A2B4A"/>
                 </a:solidFill>
                 <a:latin typeface="Noto Sans JP"/>
               </a:rPr>
@@ -10604,7 +11407,7 @@
             <a:avLst/>
           </a:prstGeom>
           <a:solidFill>
-            <a:srgbClr val="FCF0DE"/>
+            <a:srgbClr val="F8F5EE"/>
           </a:solidFill>
           <a:ln>
             <a:noFill/>
@@ -10656,13 +11459,13 @@
           <a:p>
             <a:pPr algn="l"/>
             <a:r>
-              <a:rPr sz="1300" b="0">
-                <a:solidFill>
-                  <a:srgbClr val="8B7355"/>
-                </a:solidFill>
-                <a:latin typeface="Noto Sans JP"/>
-              </a:rPr>
-              <a:t>希望の時間帯を選ぶ</a:t>
+              <a:rPr sz="1200" b="0">
+                <a:solidFill>
+                  <a:srgbClr val="6B7C9E"/>
+                </a:solidFill>
+                <a:latin typeface="Noto Sans JP"/>
+              </a:rPr>
+              <a:t>Step 1 — 日時選択</a:t>
             </a:r>
           </a:p>
         </p:txBody>
@@ -10690,9 +11493,9 @@
           <a:lstStyle/>
           <a:p>
             <a:r>
-              <a:rPr sz="1500" b="1">
-                <a:solidFill>
-                  <a:srgbClr val="735763"/>
+              <a:rPr sz="1400" b="1">
+                <a:solidFill>
+                  <a:srgbClr val="1A2B4A"/>
                 </a:solidFill>
                 <a:latin typeface="Noto Sans JP"/>
               </a:rPr>
@@ -10700,35 +11503,32 @@
             </a:r>
           </a:p>
           <a:p>
-            <a:pPr lvl="1"/>
             <a:r>
               <a:rPr sz="1300">
                 <a:solidFill>
-                  <a:srgbClr val="3D2B1F"/>
-                </a:solidFill>
-                <a:latin typeface="Noto Sans JP"/>
-              </a:rPr>
-              <a:t>・希望日をクリックして時間枠を表示</a:t>
-            </a:r>
-          </a:p>
-          <a:p>
-            <a:pPr lvl="1"/>
+                  <a:srgbClr val="1A2B4A"/>
+                </a:solidFill>
+                <a:latin typeface="Noto Sans JP"/>
+              </a:rPr>
+              <a:t>・希望日をクリック後に時間枠が表示</a:t>
+            </a:r>
+          </a:p>
+          <a:p>
             <a:r>
               <a:rPr sz="1300">
                 <a:solidFill>
-                  <a:srgbClr val="3D2B1F"/>
-                </a:solidFill>
-                <a:latin typeface="Noto Sans JP"/>
-              </a:rPr>
-              <a:t>・「予約済み」は選択不可</a:t>
-            </a:r>
-          </a:p>
-          <a:p>
-            <a:pPr lvl="1"/>
+                  <a:srgbClr val="1A2B4A"/>
+                </a:solidFill>
+                <a:latin typeface="Noto Sans JP"/>
+              </a:rPr>
+              <a:t>・「予約済み」枠は選択不可</a:t>
+            </a:r>
+          </a:p>
+          <a:p>
             <a:r>
               <a:rPr sz="1300">
                 <a:solidFill>
-                  <a:srgbClr val="3D2B1F"/>
+                  <a:srgbClr val="1A2B4A"/>
                 </a:solidFill>
                 <a:latin typeface="Noto Sans JP"/>
               </a:rPr>
@@ -10737,15 +11537,15 @@
           </a:p>
           <a:p>
             <a:r>
-              <a:rPr sz="600"/>
+              <a:rPr sz="500"/>
               <a:t/>
             </a:r>
           </a:p>
           <a:p>
             <a:r>
-              <a:rPr sz="1500" b="1">
-                <a:solidFill>
-                  <a:srgbClr val="735763"/>
+              <a:rPr sz="1400" b="1">
+                <a:solidFill>
+                  <a:srgbClr val="1A2B4A"/>
                 </a:solidFill>
                 <a:latin typeface="Noto Sans JP"/>
               </a:rPr>
@@ -10753,15 +11553,25 @@
             </a:r>
           </a:p>
           <a:p>
-            <a:pPr lvl="1"/>
             <a:r>
               <a:rPr sz="1300">
                 <a:solidFill>
-                  <a:srgbClr val="3D2B1F"/>
-                </a:solidFill>
-                <a:latin typeface="Noto Sans JP"/>
-              </a:rPr>
-              <a:t>・枠選択後「次へ → 情報入力」ボタンが有効に</a:t>
+                  <a:srgbClr val="1A2B4A"/>
+                </a:solidFill>
+                <a:latin typeface="Noto Sans JP"/>
+              </a:rPr>
+              <a:t>・枠を選択後「次へ」ボタンが有効に</a:t>
+            </a:r>
+          </a:p>
+          <a:p>
+            <a:r>
+              <a:rPr sz="1300">
+                <a:solidFill>
+                  <a:srgbClr val="1A2B4A"/>
+                </a:solidFill>
+                <a:latin typeface="Noto Sans JP"/>
+              </a:rPr>
+              <a:t>・クリックで情報入力フォームへ</a:t>
             </a:r>
           </a:p>
         </p:txBody>
@@ -10866,7 +11676,7 @@
             <a:avLst/>
           </a:prstGeom>
           <a:solidFill>
-            <a:srgbClr val="735763"/>
+            <a:srgbClr val="1A2B4A"/>
           </a:solidFill>
           <a:ln>
             <a:noFill/>
@@ -10937,14 +11747,14 @@
         </p:nvSpPr>
         <p:spPr>
           <a:xfrm>
-            <a:off x="9994392" y="91440"/>
-            <a:ext cx="2011680" cy="411480"/>
+            <a:off x="9811512" y="91440"/>
+            <a:ext cx="2194560" cy="411480"/>
           </a:xfrm>
           <a:prstGeom prst="rect">
             <a:avLst/>
           </a:prstGeom>
           <a:solidFill>
-            <a:srgbClr val="F79321"/>
+            <a:srgbClr val="D4AF37"/>
           </a:solidFill>
           <a:ln>
             <a:noFill/>
@@ -10980,8 +11790,8 @@
         </p:nvSpPr>
         <p:spPr>
           <a:xfrm>
-            <a:off x="9994392" y="91440"/>
-            <a:ext cx="2011680" cy="411480"/>
+            <a:off x="9811512" y="91440"/>
+            <a:ext cx="2194560" cy="411480"/>
           </a:xfrm>
           <a:prstGeom prst="rect">
             <a:avLst/>
@@ -10998,7 +11808,7 @@
             <a:r>
               <a:rPr sz="1300" b="1">
                 <a:solidFill>
-                  <a:srgbClr val="FFFFFF"/>
+                  <a:srgbClr val="1A2B4A"/>
                 </a:solidFill>
                 <a:latin typeface="Noto Sans JP"/>
               </a:rPr>
@@ -11022,7 +11832,7 @@
             <a:avLst/>
           </a:prstGeom>
           <a:solidFill>
-            <a:srgbClr val="FCF0DE"/>
+            <a:srgbClr val="F8F5EE"/>
           </a:solidFill>
           <a:ln>
             <a:noFill/>
@@ -11074,9 +11884,9 @@
           <a:p>
             <a:pPr algn="l"/>
             <a:r>
-              <a:rPr sz="1300" b="0">
-                <a:solidFill>
-                  <a:srgbClr val="8B7355"/>
+              <a:rPr sz="1200" b="0">
+                <a:solidFill>
+                  <a:srgbClr val="6B7C9E"/>
                 </a:solidFill>
                 <a:latin typeface="Noto Sans JP"/>
               </a:rPr>
@@ -11108,9 +11918,9 @@
           <a:lstStyle/>
           <a:p>
             <a:r>
-              <a:rPr sz="1500" b="1">
-                <a:solidFill>
-                  <a:srgbClr val="735763"/>
+              <a:rPr sz="1400" b="1">
+                <a:solidFill>
+                  <a:srgbClr val="1A2B4A"/>
                 </a:solidFill>
                 <a:latin typeface="Noto Sans JP"/>
               </a:rPr>
@@ -11118,23 +11928,32 @@
             </a:r>
           </a:p>
           <a:p>
-            <a:pPr lvl="1"/>
             <a:r>
               <a:rPr sz="1300">
                 <a:solidFill>
-                  <a:srgbClr val="3D2B1F"/>
-                </a:solidFill>
-                <a:latin typeface="Noto Sans JP"/>
-              </a:rPr>
-              <a:t>・お名前（必須）</a:t>
-            </a:r>
-          </a:p>
-          <a:p>
-            <a:pPr lvl="1"/>
+                  <a:srgbClr val="1A2B4A"/>
+                </a:solidFill>
+                <a:latin typeface="Noto Sans JP"/>
+              </a:rPr>
+              <a:t>・お名前・ふりがな（必須）</a:t>
+            </a:r>
+          </a:p>
+          <a:p>
             <a:r>
               <a:rPr sz="1300">
                 <a:solidFill>
-                  <a:srgbClr val="3D2B1F"/>
+                  <a:srgbClr val="1A2B4A"/>
+                </a:solidFill>
+                <a:latin typeface="Noto Sans JP"/>
+              </a:rPr>
+              <a:t>・生年月日（任意）</a:t>
+            </a:r>
+          </a:p>
+          <a:p>
+            <a:r>
+              <a:rPr sz="1300">
+                <a:solidFill>
+                  <a:srgbClr val="1A2B4A"/>
                 </a:solidFill>
                 <a:latin typeface="Noto Sans JP"/>
               </a:rPr>
@@ -11142,11 +11961,10 @@
             </a:r>
           </a:p>
           <a:p>
-            <a:pPr lvl="1"/>
             <a:r>
               <a:rPr sz="1300">
                 <a:solidFill>
-                  <a:srgbClr val="3D2B1F"/>
+                  <a:srgbClr val="1A2B4A"/>
                 </a:solidFill>
                 <a:latin typeface="Noto Sans JP"/>
               </a:rPr>
@@ -11154,56 +11972,75 @@
             </a:r>
           </a:p>
           <a:p>
-            <a:pPr lvl="1"/>
             <a:r>
               <a:rPr sz="1300">
                 <a:solidFill>
-                  <a:srgbClr val="3D2B1F"/>
-                </a:solidFill>
-                <a:latin typeface="Noto Sans JP"/>
-              </a:rPr>
-              <a:t>・住所（郵便番号で自動入力）</a:t>
-            </a:r>
-          </a:p>
-          <a:p>
-            <a:pPr lvl="1"/>
+                  <a:srgbClr val="1A2B4A"/>
+                </a:solidFill>
+                <a:latin typeface="Noto Sans JP"/>
+              </a:rPr>
+              <a:t>・住所（郵便番号→自動補完）</a:t>
+            </a:r>
+          </a:p>
+          <a:p>
             <a:r>
               <a:rPr sz="1300">
                 <a:solidFill>
-                  <a:srgbClr val="3D2B1F"/>
-                </a:solidFill>
-                <a:latin typeface="Noto Sans JP"/>
-              </a:rPr>
-              <a:t>・症状・伝達事項（任意）</a:t>
-            </a:r>
-          </a:p>
-          <a:p>
-            <a:r>
-              <a:rPr sz="600"/>
+                  <a:srgbClr val="1A2B4A"/>
+                </a:solidFill>
+                <a:latin typeface="Noto Sans JP"/>
+              </a:rPr>
+              <a:t>・性別・初診/再診・保険有無</a:t>
+            </a:r>
+          </a:p>
+          <a:p>
+            <a:r>
+              <a:rPr sz="1300">
+                <a:solidFill>
+                  <a:srgbClr val="1A2B4A"/>
+                </a:solidFill>
+                <a:latin typeface="Noto Sans JP"/>
+              </a:rPr>
+              <a:t>・症状・連絡方法（任意）</a:t>
+            </a:r>
+          </a:p>
+          <a:p>
+            <a:r>
+              <a:rPr sz="500"/>
               <a:t/>
             </a:r>
           </a:p>
           <a:p>
             <a:r>
-              <a:rPr sz="1500" b="1">
-                <a:solidFill>
-                  <a:srgbClr val="735763"/>
-                </a:solidFill>
-                <a:latin typeface="Noto Sans JP"/>
-              </a:rPr>
-              <a:t>郵便番号機能</a:t>
-            </a:r>
-          </a:p>
-          <a:p>
-            <a:pPr lvl="1"/>
+              <a:rPr sz="1400" b="1">
+                <a:solidFill>
+                  <a:srgbClr val="1A2B4A"/>
+                </a:solidFill>
+                <a:latin typeface="Noto Sans JP"/>
+              </a:rPr>
+              <a:t>郵便番号自動補完</a:t>
+            </a:r>
+          </a:p>
+          <a:p>
             <a:r>
               <a:rPr sz="1300">
                 <a:solidFill>
-                  <a:srgbClr val="3D2B1F"/>
-                </a:solidFill>
-                <a:latin typeface="Noto Sans JP"/>
-              </a:rPr>
-              <a:t>・7桁入力で住所を自動補完</a:t>
+                  <a:srgbClr val="1A2B4A"/>
+                </a:solidFill>
+                <a:latin typeface="Noto Sans JP"/>
+              </a:rPr>
+              <a:t>・7桁入力で住所を自動入力</a:t>
+            </a:r>
+          </a:p>
+          <a:p>
+            <a:r>
+              <a:rPr sz="1200">
+                <a:solidFill>
+                  <a:srgbClr val="B45A00"/>
+                </a:solidFill>
+                <a:latin typeface="Noto Sans JP"/>
+              </a:rPr>
+              <a:t>⚠ 半角数字で入力してください</a:t>
             </a:r>
           </a:p>
         </p:txBody>
@@ -11308,7 +12145,7 @@
             <a:avLst/>
           </a:prstGeom>
           <a:solidFill>
-            <a:srgbClr val="735763"/>
+            <a:srgbClr val="1A2B4A"/>
           </a:solidFill>
           <a:ln>
             <a:noFill/>
@@ -11379,14 +12216,14 @@
         </p:nvSpPr>
         <p:spPr>
           <a:xfrm>
-            <a:off x="9994392" y="91440"/>
-            <a:ext cx="2011680" cy="411480"/>
+            <a:off x="9811512" y="91440"/>
+            <a:ext cx="2194560" cy="411480"/>
           </a:xfrm>
           <a:prstGeom prst="rect">
             <a:avLst/>
           </a:prstGeom>
           <a:solidFill>
-            <a:srgbClr val="F79321"/>
+            <a:srgbClr val="D4AF37"/>
           </a:solidFill>
           <a:ln>
             <a:noFill/>
@@ -11422,8 +12259,8 @@
         </p:nvSpPr>
         <p:spPr>
           <a:xfrm>
-            <a:off x="9994392" y="91440"/>
-            <a:ext cx="2011680" cy="411480"/>
+            <a:off x="9811512" y="91440"/>
+            <a:ext cx="2194560" cy="411480"/>
           </a:xfrm>
           <a:prstGeom prst="rect">
             <a:avLst/>
@@ -11440,7 +12277,7 @@
             <a:r>
               <a:rPr sz="1300" b="1">
                 <a:solidFill>
-                  <a:srgbClr val="FFFFFF"/>
+                  <a:srgbClr val="1A2B4A"/>
                 </a:solidFill>
                 <a:latin typeface="Noto Sans JP"/>
               </a:rPr>
@@ -11464,7 +12301,7 @@
             <a:avLst/>
           </a:prstGeom>
           <a:solidFill>
-            <a:srgbClr val="FCF0DE"/>
+            <a:srgbClr val="F8F5EE"/>
           </a:solidFill>
           <a:ln>
             <a:noFill/>
@@ -11516,9 +12353,9 @@
           <a:p>
             <a:pPr algn="l"/>
             <a:r>
-              <a:rPr sz="1300" b="0">
-                <a:solidFill>
-                  <a:srgbClr val="8B7355"/>
+              <a:rPr sz="1200" b="0">
+                <a:solidFill>
+                  <a:srgbClr val="6B7C9E"/>
                 </a:solidFill>
                 <a:latin typeface="Noto Sans JP"/>
               </a:rPr>
@@ -11550,9 +12387,9 @@
           <a:lstStyle/>
           <a:p>
             <a:r>
-              <a:rPr sz="1500" b="1">
-                <a:solidFill>
-                  <a:srgbClr val="735763"/>
+              <a:rPr sz="1400" b="1">
+                <a:solidFill>
+                  <a:srgbClr val="1A2B4A"/>
                 </a:solidFill>
                 <a:latin typeface="Noto Sans JP"/>
               </a:rPr>
@@ -11560,11 +12397,10 @@
             </a:r>
           </a:p>
           <a:p>
-            <a:pPr lvl="1"/>
             <a:r>
               <a:rPr sz="1300">
                 <a:solidFill>
-                  <a:srgbClr val="3D2B1F"/>
+                  <a:srgbClr val="1A2B4A"/>
                 </a:solidFill>
                 <a:latin typeface="Noto Sans JP"/>
               </a:rPr>
@@ -11572,56 +12408,81 @@
             </a:r>
           </a:p>
           <a:p>
-            <a:pPr lvl="1"/>
             <a:r>
               <a:rPr sz="1300">
                 <a:solidFill>
-                  <a:srgbClr val="3D2B1F"/>
-                </a:solidFill>
-                <a:latin typeface="Noto Sans JP"/>
-              </a:rPr>
-              <a:t>・「この内容で予約する」で完了</a:t>
-            </a:r>
-          </a:p>
-          <a:p>
-            <a:r>
-              <a:rPr sz="600"/>
+                  <a:srgbClr val="1A2B4A"/>
+                </a:solidFill>
+                <a:latin typeface="Noto Sans JP"/>
+              </a:rPr>
+              <a:t>・「修正する」で前の画面に戻れます</a:t>
+            </a:r>
+          </a:p>
+          <a:p>
+            <a:r>
+              <a:rPr sz="500"/>
               <a:t/>
             </a:r>
           </a:p>
           <a:p>
             <a:r>
-              <a:rPr sz="1500" b="1">
-                <a:solidFill>
-                  <a:srgbClr val="735763"/>
-                </a:solidFill>
-                <a:latin typeface="Noto Sans JP"/>
-              </a:rPr>
-              <a:t>予約完了後</a:t>
-            </a:r>
-          </a:p>
-          <a:p>
-            <a:pPr lvl="1"/>
+              <a:rPr sz="1400" b="1">
+                <a:solidFill>
+                  <a:srgbClr val="1A2B4A"/>
+                </a:solidFill>
+                <a:latin typeface="Noto Sans JP"/>
+              </a:rPr>
+              <a:t>予約の確定</a:t>
+            </a:r>
+          </a:p>
+          <a:p>
             <a:r>
               <a:rPr sz="1300">
                 <a:solidFill>
-                  <a:srgbClr val="3D2B1F"/>
-                </a:solidFill>
-                <a:latin typeface="Noto Sans JP"/>
-              </a:rPr>
-              <a:t>・予約IDが発行されます</a:t>
-            </a:r>
-          </a:p>
-          <a:p>
-            <a:pPr lvl="1"/>
+                  <a:srgbClr val="1A2B4A"/>
+                </a:solidFill>
+                <a:latin typeface="Noto Sans JP"/>
+              </a:rPr>
+              <a:t>・「この内容で予約する」で確定</a:t>
+            </a:r>
+          </a:p>
+          <a:p>
             <a:r>
               <a:rPr sz="1300">
                 <a:solidFill>
-                  <a:srgbClr val="3D2B1F"/>
-                </a:solidFill>
-                <a:latin typeface="Noto Sans JP"/>
-              </a:rPr>
-              <a:t>・確認メールが送信されます</a:t>
+                  <a:srgbClr val="1A2B4A"/>
+                </a:solidFill>
+                <a:latin typeface="Noto Sans JP"/>
+              </a:rPr>
+              <a:t>・サーバー側で空き確認後に登録</a:t>
+            </a:r>
+          </a:p>
+          <a:p>
+            <a:r>
+              <a:rPr sz="500"/>
+              <a:t/>
+            </a:r>
+          </a:p>
+          <a:p>
+            <a:r>
+              <a:rPr sz="1200">
+                <a:solidFill>
+                  <a:srgbClr val="B45A00"/>
+                </a:solidFill>
+                <a:latin typeface="Noto Sans JP"/>
+              </a:rPr>
+              <a:t>⚠ 「予約済み」になった場合は</a:t>
+            </a:r>
+          </a:p>
+          <a:p>
+            <a:r>
+              <a:rPr sz="1300">
+                <a:solidFill>
+                  <a:srgbClr val="1A2B4A"/>
+                </a:solidFill>
+                <a:latin typeface="Noto Sans JP"/>
+              </a:rPr>
+              <a:t>　別の時間帯をお選びください</a:t>
             </a:r>
           </a:p>
         </p:txBody>
@@ -11726,7 +12587,7 @@
             <a:avLst/>
           </a:prstGeom>
           <a:solidFill>
-            <a:srgbClr val="735763"/>
+            <a:srgbClr val="1A2B4A"/>
           </a:solidFill>
           <a:ln>
             <a:noFill/>
@@ -11784,7 +12645,7 @@
                 </a:solidFill>
                 <a:latin typeface="Noto Sans JP"/>
               </a:rPr>
-              <a:t>予約キャンセル</a:t>
+              <a:t>予約完了（Step 4）</a:t>
             </a:r>
           </a:p>
         </p:txBody>
@@ -11797,14 +12658,14 @@
         </p:nvSpPr>
         <p:spPr>
           <a:xfrm>
-            <a:off x="9994392" y="91440"/>
-            <a:ext cx="2011680" cy="411480"/>
+            <a:off x="9811512" y="91440"/>
+            <a:ext cx="2194560" cy="411480"/>
           </a:xfrm>
           <a:prstGeom prst="rect">
             <a:avLst/>
           </a:prstGeom>
           <a:solidFill>
-            <a:srgbClr val="F79321"/>
+            <a:srgbClr val="D4AF37"/>
           </a:solidFill>
           <a:ln>
             <a:noFill/>
@@ -11840,8 +12701,8 @@
         </p:nvSpPr>
         <p:spPr>
           <a:xfrm>
-            <a:off x="9994392" y="91440"/>
-            <a:ext cx="2011680" cy="411480"/>
+            <a:off x="9811512" y="91440"/>
+            <a:ext cx="2194560" cy="411480"/>
           </a:xfrm>
           <a:prstGeom prst="rect">
             <a:avLst/>
@@ -11858,7 +12719,7 @@
             <a:r>
               <a:rPr sz="1300" b="1">
                 <a:solidFill>
-                  <a:srgbClr val="FFFFFF"/>
+                  <a:srgbClr val="1A2B4A"/>
                 </a:solidFill>
                 <a:latin typeface="Noto Sans JP"/>
               </a:rPr>
@@ -11882,7 +12743,7 @@
             <a:avLst/>
           </a:prstGeom>
           <a:solidFill>
-            <a:srgbClr val="FCF0DE"/>
+            <a:srgbClr val="F8F5EE"/>
           </a:solidFill>
           <a:ln>
             <a:noFill/>
@@ -11934,13 +12795,13 @@
           <a:p>
             <a:pPr algn="l"/>
             <a:r>
-              <a:rPr sz="1300" b="0">
-                <a:solidFill>
-                  <a:srgbClr val="8B7355"/>
-                </a:solidFill>
-                <a:latin typeface="Noto Sans JP"/>
-              </a:rPr>
-              <a:t>キャンセルの手順</a:t>
+              <a:rPr sz="1200" b="0">
+                <a:solidFill>
+                  <a:srgbClr val="6B7C9E"/>
+                </a:solidFill>
+                <a:latin typeface="Noto Sans JP"/>
+              </a:rPr>
+              <a:t>予約が完了しました</a:t>
             </a:r>
           </a:p>
         </p:txBody>
@@ -11968,106 +12829,156 @@
           <a:lstStyle/>
           <a:p>
             <a:r>
-              <a:rPr sz="1500" b="1">
-                <a:solidFill>
-                  <a:srgbClr val="735763"/>
-                </a:solidFill>
-                <a:latin typeface="Noto Sans JP"/>
-              </a:rPr>
-              <a:t>キャンセル方法</a:t>
-            </a:r>
-          </a:p>
-          <a:p>
-            <a:pPr lvl="1"/>
+              <a:rPr sz="1400" b="1">
+                <a:solidFill>
+                  <a:srgbClr val="1A2B4A"/>
+                </a:solidFill>
+                <a:latin typeface="Noto Sans JP"/>
+              </a:rPr>
+              <a:t>完了後の流れ</a:t>
+            </a:r>
+          </a:p>
+          <a:p>
             <a:r>
               <a:rPr sz="1300">
                 <a:solidFill>
-                  <a:srgbClr val="3D2B1F"/>
-                </a:solidFill>
-                <a:latin typeface="Noto Sans JP"/>
-              </a:rPr>
-              <a:t>・予約IDを入力してキャンセル</a:t>
-            </a:r>
-          </a:p>
-          <a:p>
-            <a:pPr lvl="1"/>
+                  <a:srgbClr val="1A2B4A"/>
+                </a:solidFill>
+                <a:latin typeface="Noto Sans JP"/>
+              </a:rPr>
+              <a:t>・予約 ID が画面に表示されます</a:t>
+            </a:r>
+          </a:p>
+          <a:p>
             <a:r>
               <a:rPr sz="1300">
                 <a:solidFill>
-                  <a:srgbClr val="3D2B1F"/>
-                </a:solidFill>
-                <a:latin typeface="Noto Sans JP"/>
-              </a:rPr>
-              <a:t>・確認後、取り消しが完了</a:t>
-            </a:r>
-          </a:p>
-          <a:p>
-            <a:r>
-              <a:rPr sz="600"/>
+                  <a:srgbClr val="1A2B4A"/>
+                </a:solidFill>
+                <a:latin typeface="Noto Sans JP"/>
+              </a:rPr>
+              <a:t>・メールアドレスを入力した場合は</a:t>
+            </a:r>
+          </a:p>
+          <a:p>
+            <a:r>
+              <a:rPr sz="1300">
+                <a:solidFill>
+                  <a:srgbClr val="1A2B4A"/>
+                </a:solidFill>
+                <a:latin typeface="Noto Sans JP"/>
+              </a:rPr>
+              <a:t>　確認メールが届きます</a:t>
+            </a:r>
+          </a:p>
+          <a:p>
+            <a:r>
+              <a:rPr sz="500"/>
               <a:t/>
             </a:r>
           </a:p>
           <a:p>
             <a:r>
-              <a:rPr sz="1500" b="1">
-                <a:solidFill>
-                  <a:srgbClr val="735763"/>
-                </a:solidFill>
-                <a:latin typeface="Noto Sans JP"/>
-              </a:rPr>
-              <a:t>注意事項</a:t>
-            </a:r>
-          </a:p>
-          <a:p>
-            <a:pPr lvl="1"/>
+              <a:rPr sz="1200">
+                <a:solidFill>
+                  <a:srgbClr val="B45A00"/>
+                </a:solidFill>
+                <a:latin typeface="Noto Sans JP"/>
+              </a:rPr>
+              <a:t>⚠ 予約 ID はキャンセル時に必要です</a:t>
+            </a:r>
+          </a:p>
+          <a:p>
             <a:r>
               <a:rPr sz="1300">
                 <a:solidFill>
-                  <a:srgbClr val="3D2B1F"/>
-                </a:solidFill>
-                <a:latin typeface="Noto Sans JP"/>
-              </a:rPr>
-              <a:t>・前日までのキャンセルを推奨</a:t>
-            </a:r>
-          </a:p>
-          <a:p>
-            <a:pPr lvl="1"/>
-            <a:r>
-              <a:rPr sz="1300">
-                <a:solidFill>
-                  <a:srgbClr val="3D2B1F"/>
-                </a:solidFill>
-                <a:latin typeface="Noto Sans JP"/>
-              </a:rPr>
-              <a:t>・キャンセル通知メールが届きます</a:t>
-            </a:r>
-          </a:p>
-        </p:txBody>
-      </p:sp>
-      <p:pic>
-        <p:nvPicPr>
-          <p:cNvPr id="10" name="Picture 9" descr="06_cancel_page.png"/>
-          <p:cNvPicPr>
-            <a:picLocks noChangeAspect="1"/>
-          </p:cNvPicPr>
-          <p:nvPr/>
-        </p:nvPicPr>
-        <p:blipFill>
-          <a:blip r:embed="rId2"/>
-          <a:stretch>
-            <a:fillRect/>
-          </a:stretch>
-        </p:blipFill>
-        <p:spPr>
-          <a:xfrm>
-            <a:off x="4160520" y="1251585"/>
-            <a:ext cx="7845552" cy="4903470"/>
-          </a:xfrm>
-          <a:prstGeom prst="rect">
-            <a:avLst/>
-          </a:prstGeom>
-        </p:spPr>
-      </p:pic>
+                  <a:srgbClr val="1A2B4A"/>
+                </a:solidFill>
+                <a:latin typeface="Noto Sans JP"/>
+              </a:rPr>
+              <a:t>　スクリーンショットで保存推奨</a:t>
+            </a:r>
+          </a:p>
+        </p:txBody>
+      </p:sp>
+      <p:sp>
+        <p:nvSpPr>
+          <p:cNvPr id="10" name="Rectangle 9"/>
+          <p:cNvSpPr/>
+          <p:nvPr/>
+        </p:nvSpPr>
+        <p:spPr>
+          <a:xfrm>
+            <a:off x="4160520" y="868680"/>
+            <a:ext cx="7845552" cy="5669280"/>
+          </a:xfrm>
+          <a:prstGeom prst="rect">
+            <a:avLst/>
+          </a:prstGeom>
+          <a:solidFill>
+            <a:srgbClr val="CCCCCC"/>
+          </a:solidFill>
+          <a:ln>
+            <a:noFill/>
+          </a:ln>
+        </p:spPr>
+        <p:style>
+          <a:lnRef idx="1">
+            <a:schemeClr val="accent1"/>
+          </a:lnRef>
+          <a:fillRef idx="3">
+            <a:schemeClr val="accent1"/>
+          </a:fillRef>
+          <a:effectRef idx="2">
+            <a:schemeClr val="accent1"/>
+          </a:effectRef>
+          <a:fontRef idx="minor">
+            <a:schemeClr val="lt1"/>
+          </a:fontRef>
+        </p:style>
+        <p:txBody>
+          <a:bodyPr rtlCol="0" anchor="ctr"/>
+          <a:lstStyle/>
+          <a:p>
+            <a:pPr algn="ctr"/>
+          </a:p>
+        </p:txBody>
+      </p:sp>
+      <p:sp>
+        <p:nvSpPr>
+          <p:cNvPr id="11" name="TextBox 10"/>
+          <p:cNvSpPr txBox="1"/>
+          <p:nvPr/>
+        </p:nvSpPr>
+        <p:spPr>
+          <a:xfrm>
+            <a:off x="4160520" y="3429000"/>
+            <a:ext cx="7845552" cy="548640"/>
+          </a:xfrm>
+          <a:prstGeom prst="rect">
+            <a:avLst/>
+          </a:prstGeom>
+          <a:noFill/>
+        </p:spPr>
+        <p:txBody>
+          <a:bodyPr wrap="square">
+            <a:spAutoFit/>
+          </a:bodyPr>
+          <a:lstStyle/>
+          <a:p>
+            <a:pPr algn="ctr"/>
+            <a:r>
+              <a:rPr sz="1300" b="0">
+                <a:solidFill>
+                  <a:srgbClr val="666666"/>
+                </a:solidFill>
+                <a:latin typeface="Noto Sans JP"/>
+              </a:rPr>
+              <a:t>（スクリーンショット準備中）</a:t>
+            </a:r>
+          </a:p>
+        </p:txBody>
+      </p:sp>
     </p:spTree>
   </p:cSld>
   <p:clrMapOvr>
@@ -12144,7 +13055,7 @@
             <a:avLst/>
           </a:prstGeom>
           <a:solidFill>
-            <a:srgbClr val="735763"/>
+            <a:srgbClr val="1A2B4A"/>
           </a:solidFill>
           <a:ln>
             <a:noFill/>
@@ -12202,7 +13113,7 @@
                 </a:solidFill>
                 <a:latin typeface="Noto Sans JP"/>
               </a:rPr>
-              <a:t>プライバシーポリシー</a:t>
+              <a:t>予約キャンセル（/cancel）</a:t>
             </a:r>
           </a:p>
         </p:txBody>
@@ -12215,14 +13126,14 @@
         </p:nvSpPr>
         <p:spPr>
           <a:xfrm>
-            <a:off x="9994392" y="91440"/>
-            <a:ext cx="2011680" cy="411480"/>
+            <a:off x="9811512" y="91440"/>
+            <a:ext cx="2194560" cy="411480"/>
           </a:xfrm>
           <a:prstGeom prst="rect">
             <a:avLst/>
           </a:prstGeom>
           <a:solidFill>
-            <a:srgbClr val="F79321"/>
+            <a:srgbClr val="D4AF37"/>
           </a:solidFill>
           <a:ln>
             <a:noFill/>
@@ -12258,8 +13169,8 @@
         </p:nvSpPr>
         <p:spPr>
           <a:xfrm>
-            <a:off x="9994392" y="91440"/>
-            <a:ext cx="2011680" cy="411480"/>
+            <a:off x="9811512" y="91440"/>
+            <a:ext cx="2194560" cy="411480"/>
           </a:xfrm>
           <a:prstGeom prst="rect">
             <a:avLst/>
@@ -12276,7 +13187,7 @@
             <a:r>
               <a:rPr sz="1300" b="1">
                 <a:solidFill>
-                  <a:srgbClr val="FFFFFF"/>
+                  <a:srgbClr val="1A2B4A"/>
                 </a:solidFill>
                 <a:latin typeface="Noto Sans JP"/>
               </a:rPr>
@@ -12300,7 +13211,7 @@
             <a:avLst/>
           </a:prstGeom>
           <a:solidFill>
-            <a:srgbClr val="FCF0DE"/>
+            <a:srgbClr val="F8F5EE"/>
           </a:solidFill>
           <a:ln>
             <a:noFill/>
@@ -12352,13 +13263,13 @@
           <a:p>
             <a:pPr algn="l"/>
             <a:r>
-              <a:rPr sz="1300" b="0">
-                <a:solidFill>
-                  <a:srgbClr val="8B7355"/>
-                </a:solidFill>
-                <a:latin typeface="Noto Sans JP"/>
-              </a:rPr>
-              <a:t>個人情報の取り扱いについて</a:t>
+              <a:rPr sz="1200" b="0">
+                <a:solidFill>
+                  <a:srgbClr val="6B7C9E"/>
+                </a:solidFill>
+                <a:latin typeface="Noto Sans JP"/>
+              </a:rPr>
+              <a:t>キャンセルの手順</a:t>
             </a:r>
           </a:p>
         </p:txBody>
@@ -12386,56 +13297,120 @@
           <a:lstStyle/>
           <a:p>
             <a:r>
-              <a:rPr sz="1500" b="1">
-                <a:solidFill>
-                  <a:srgbClr val="735763"/>
-                </a:solidFill>
-                <a:latin typeface="Noto Sans JP"/>
-              </a:rPr>
-              <a:t>個人情報の取り扱い</a:t>
-            </a:r>
-          </a:p>
-          <a:p>
-            <a:pPr lvl="1"/>
+              <a:rPr sz="1400" b="1">
+                <a:solidFill>
+                  <a:srgbClr val="1A2B4A"/>
+                </a:solidFill>
+                <a:latin typeface="Noto Sans JP"/>
+              </a:rPr>
+              <a:t>キャンセル方法</a:t>
+            </a:r>
+          </a:p>
+          <a:p>
             <a:r>
               <a:rPr sz="1300">
                 <a:solidFill>
-                  <a:srgbClr val="3D2B1F"/>
-                </a:solidFill>
-                <a:latin typeface="Noto Sans JP"/>
-              </a:rPr>
-              <a:t>・入力情報は予約管理のみに使用</a:t>
-            </a:r>
-          </a:p>
-          <a:p>
-            <a:pPr lvl="1"/>
+                  <a:srgbClr val="1A2B4A"/>
+                </a:solidFill>
+                <a:latin typeface="Noto Sans JP"/>
+              </a:rPr>
+              <a:t>・予約 ID を入力</a:t>
+            </a:r>
+          </a:p>
+          <a:p>
             <a:r>
               <a:rPr sz="1300">
                 <a:solidFill>
-                  <a:srgbClr val="3D2B1F"/>
-                </a:solidFill>
-                <a:latin typeface="Noto Sans JP"/>
-              </a:rPr>
-              <a:t>・第三者への提供は行いません</a:t>
-            </a:r>
-          </a:p>
-          <a:p>
-            <a:pPr lvl="1"/>
+                  <a:srgbClr val="1A2B4A"/>
+                </a:solidFill>
+                <a:latin typeface="Noto Sans JP"/>
+              </a:rPr>
+              <a:t>・電話番号を入力（照合用）</a:t>
+            </a:r>
+          </a:p>
+          <a:p>
             <a:r>
               <a:rPr sz="1300">
                 <a:solidFill>
-                  <a:srgbClr val="3D2B1F"/>
-                </a:solidFill>
-                <a:latin typeface="Noto Sans JP"/>
-              </a:rPr>
-              <a:t>・問い合わせは院内窓口まで</a:t>
+                  <a:srgbClr val="1A2B4A"/>
+                </a:solidFill>
+                <a:latin typeface="Noto Sans JP"/>
+              </a:rPr>
+              <a:t>・「キャンセルする」をクリック</a:t>
+            </a:r>
+          </a:p>
+          <a:p>
+            <a:r>
+              <a:rPr sz="500"/>
+              <a:t/>
+            </a:r>
+          </a:p>
+          <a:p>
+            <a:r>
+              <a:rPr sz="1400" b="1">
+                <a:solidFill>
+                  <a:srgbClr val="1A2B4A"/>
+                </a:solidFill>
+                <a:latin typeface="Noto Sans JP"/>
+              </a:rPr>
+              <a:t>セキュリティ</a:t>
+            </a:r>
+          </a:p>
+          <a:p>
+            <a:r>
+              <a:rPr sz="1300">
+                <a:solidFill>
+                  <a:srgbClr val="1A2B4A"/>
+                </a:solidFill>
+                <a:latin typeface="Noto Sans JP"/>
+              </a:rPr>
+              <a:t>・電話番号が一致しないと</a:t>
+            </a:r>
+          </a:p>
+          <a:p>
+            <a:r>
+              <a:rPr sz="1300">
+                <a:solidFill>
+                  <a:srgbClr val="1A2B4A"/>
+                </a:solidFill>
+                <a:latin typeface="Noto Sans JP"/>
+              </a:rPr>
+              <a:t>　キャンセル不可（なりすまし防止）</a:t>
+            </a:r>
+          </a:p>
+          <a:p>
+            <a:r>
+              <a:rPr sz="1300">
+                <a:solidFill>
+                  <a:srgbClr val="1A2B4A"/>
+                </a:solidFill>
+                <a:latin typeface="Noto Sans JP"/>
+              </a:rPr>
+              <a:t>・キャンセル通知メールが届きます</a:t>
+            </a:r>
+          </a:p>
+          <a:p>
+            <a:r>
+              <a:rPr sz="500"/>
+              <a:t/>
+            </a:r>
+          </a:p>
+          <a:p>
+            <a:r>
+              <a:rPr sz="1200">
+                <a:solidFill>
+                  <a:srgbClr val="B45A00"/>
+                </a:solidFill>
+                <a:latin typeface="Noto Sans JP"/>
+              </a:rPr>
+              <a:t>⚠ 前日までのキャンセルを推奨</a:t>
             </a:r>
           </a:p>
         </p:txBody>
       </p:sp>
       <p:pic>
         <p:nvPicPr>
-          <p:cNvPr id="10" name="Picture 9" descr="07_privacy_policy.png"/>
+          <p:cNvPr id="10" name="Picture 9" descr="06_cancel_page.png"/>
           <p:cNvPicPr>
             <a:picLocks noChangeAspect="1"/>
           </p:cNvPicPr>
